--- a/JH_FY27_SharedServices_Initiatives.pptx
+++ b/JH_FY27_SharedServices_Initiatives.pptx
@@ -17,9 +17,10 @@
     <p:sldId id="265" r:id="rId11"/>
     <p:sldId id="266" r:id="rId12"/>
     <p:sldId id="267" r:id="rId13"/>
+    <p:sldId id="268" r:id="rId14"/>
   </p:sldIdLst>
   <p:notesMasterIdLst>
-    <p:notesMasterId r:id="rId14"/>
+    <p:notesMasterId r:id="rId15"/>
   </p:notesMasterIdLst>
   <p:sldSz cx="9144000" cy="5143500"/>
   <p:notesSz cx="5143500" cy="9144000"/>
@@ -819,6 +820,94 @@
 </p:notes>
 </file>
 
+<file path=ppt/notesSlides/notesSlide13.xml><?xml version="1.0" encoding="utf-8"?>
+<p:notes xmlns:a="http://schemas.openxmlformats.org/drawingml/2006/main" xmlns:r="http://schemas.openxmlformats.org/officeDocument/2006/relationships" xmlns:p="http://schemas.openxmlformats.org/presentationml/2006/main">
+  <p:cSld>
+    <p:spTree>
+      <p:nvGrpSpPr>
+        <p:cNvPr id="1" name=""/>
+        <p:cNvGrpSpPr/>
+        <p:nvPr/>
+      </p:nvGrpSpPr>
+      <p:grpSpPr>
+        <a:xfrm>
+          <a:off x="0" y="0"/>
+          <a:ext cx="0" cy="0"/>
+          <a:chOff x="0" y="0"/>
+          <a:chExt cx="0" cy="0"/>
+        </a:xfrm>
+      </p:grpSpPr>
+      <p:sp>
+        <p:nvSpPr>
+          <p:cNvPr id="2" name="Slide Image Placeholder 1"/>
+          <p:cNvSpPr>
+            <a:spLocks noGrp="1" noRot="1" noChangeAspect="1"/>
+          </p:cNvSpPr>
+          <p:nvPr>
+            <p:ph type="sldImg"/>
+          </p:nvPr>
+        </p:nvSpPr>
+        <p:spPr/>
+      </p:sp>
+      <p:sp>
+        <p:nvSpPr>
+          <p:cNvPr id="3" name="Notes Placeholder 2"/>
+          <p:cNvSpPr>
+            <a:spLocks noGrp="1"/>
+          </p:cNvSpPr>
+          <p:nvPr>
+            <p:ph type="body" idx="1"/>
+          </p:nvPr>
+        </p:nvSpPr>
+        <p:spPr/>
+        <p:txBody>
+          <a:bodyPr/>
+          <a:lstStyle/>
+          <a:p>
+            <a:r>
+              <a:rPr lang="en-US" dirty="0"/>
+              <a:t/>
+            </a:r>
+            <a:endParaRPr lang="en-US" dirty="0"/>
+          </a:p>
+        </p:txBody>
+      </p:sp>
+      <p:sp>
+        <p:nvSpPr>
+          <p:cNvPr id="4" name="Slide Number Placeholder 3"/>
+          <p:cNvSpPr>
+            <a:spLocks noGrp="1"/>
+          </p:cNvSpPr>
+          <p:nvPr>
+            <p:ph type="sldNum" sz="quarter" idx="10"/>
+          </p:nvPr>
+        </p:nvSpPr>
+        <p:spPr/>
+        <p:txBody>
+          <a:bodyPr/>
+          <a:lstStyle/>
+          <a:p>
+            <a:fld id="{F7021451-1387-4CA6-816F-3879F97B5CBC}" type="slidenum">
+              <a:rPr lang="en-US"/>
+              <a:t>13</a:t>
+            </a:fld>
+            <a:endParaRPr lang="en-US"/>
+          </a:p>
+        </p:txBody>
+      </p:sp>
+    </p:spTree>
+    <p:extLst>
+      <p:ext uri="{BB962C8B-B14F-4D97-AF65-F5344CB8AC3E}">
+        <p14:creationId xmlns:p14="http://schemas.microsoft.com/office/powerpoint/2010/main" val="1024086991"/>
+      </p:ext>
+    </p:extLst>
+  </p:cSld>
+  <p:clrMapOvr>
+    <a:masterClrMapping/>
+  </p:clrMapOvr>
+</p:notes>
+</file>
+
 <file path=ppt/notesSlides/notesSlide2.xml><?xml version="1.0" encoding="utf-8"?>
 <p:notes xmlns:a="http://schemas.openxmlformats.org/drawingml/2006/main" xmlns:r="http://schemas.openxmlformats.org/officeDocument/2006/relationships" xmlns:p="http://schemas.openxmlformats.org/presentationml/2006/main">
   <p:cSld>
@@ -8317,6 +8406,3088 @@
                 <a:cs typeface="Calibri" pitchFamily="34" charset="-120"/>
               </a:rPr>
               <a:t>Auto feature engineering  ·  Model stacking &amp; ensembling  ·  Zero manual hyperparameter tuning  ·  Single API, three capability types  ·  Production-ready in days</a:t>
+            </a:r>
+            <a:endParaRPr lang="en-US" sz="850" dirty="0"/>
+          </a:p>
+        </p:txBody>
+      </p:sp>
+    </p:spTree>
+  </p:cSld>
+  <p:clrMapOvr>
+    <a:masterClrMapping/>
+  </p:clrMapOvr>
+</p:sld>
+</file>
+
+<file path=ppt/slides/slide13.xml><?xml version="1.0" encoding="utf-8"?>
+<p:sld xmlns:a="http://schemas.openxmlformats.org/drawingml/2006/main" xmlns:r="http://schemas.openxmlformats.org/officeDocument/2006/relationships" xmlns:p="http://schemas.openxmlformats.org/presentationml/2006/main">
+  <p:cSld name="Slide 13">
+    <p:bg>
+      <p:bgPr>
+        <a:solidFill>
+          <a:srgbClr val="F5F7FB"/>
+        </a:solidFill>
+      </p:bgPr>
+    </p:bg>
+    <p:spTree>
+      <p:nvGrpSpPr>
+        <p:cNvPr id="1" name=""/>
+        <p:cNvGrpSpPr/>
+        <p:nvPr/>
+      </p:nvGrpSpPr>
+      <p:grpSpPr>
+        <a:xfrm>
+          <a:off x="0" y="0"/>
+          <a:ext cx="0" cy="0"/>
+          <a:chOff x="0" y="0"/>
+          <a:chExt cx="0" cy="0"/>
+        </a:xfrm>
+      </p:grpSpPr>
+      <p:sp>
+        <p:nvSpPr>
+          <p:cNvPr id="2" name="Shape 0"/>
+          <p:cNvSpPr/>
+          <p:nvPr/>
+        </p:nvSpPr>
+        <p:spPr>
+          <a:xfrm>
+            <a:off x="0" y="0"/>
+            <a:ext cx="9144000" cy="1024128"/>
+          </a:xfrm>
+          <a:prstGeom prst="rect">
+            <a:avLst/>
+          </a:prstGeom>
+          <a:solidFill>
+            <a:srgbClr val="0A1C40"/>
+          </a:solidFill>
+          <a:ln w="12700">
+            <a:solidFill>
+              <a:srgbClr val="0A1C40"/>
+            </a:solidFill>
+            <a:prstDash val="solid"/>
+          </a:ln>
+        </p:spPr>
+      </p:sp>
+      <p:sp>
+        <p:nvSpPr>
+          <p:cNvPr id="3" name="Shape 1"/>
+          <p:cNvSpPr/>
+          <p:nvPr/>
+        </p:nvSpPr>
+        <p:spPr>
+          <a:xfrm>
+            <a:off x="0" y="0"/>
+            <a:ext cx="109728" cy="1024128"/>
+          </a:xfrm>
+          <a:prstGeom prst="rect">
+            <a:avLst/>
+          </a:prstGeom>
+          <a:solidFill>
+            <a:srgbClr val="29A8E0"/>
+          </a:solidFill>
+          <a:ln w="12700">
+            <a:solidFill>
+              <a:srgbClr val="29A8E0"/>
+            </a:solidFill>
+            <a:prstDash val="solid"/>
+          </a:ln>
+        </p:spPr>
+      </p:sp>
+      <p:sp>
+        <p:nvSpPr>
+          <p:cNvPr id="4" name="Text 2"/>
+          <p:cNvSpPr/>
+          <p:nvPr/>
+        </p:nvSpPr>
+        <p:spPr>
+          <a:xfrm>
+            <a:off x="256032" y="73152"/>
+            <a:ext cx="8686800" cy="475488"/>
+          </a:xfrm>
+          <a:prstGeom prst="rect">
+            <a:avLst/>
+          </a:prstGeom>
+          <a:noFill/>
+          <a:ln/>
+        </p:spPr>
+        <p:txBody>
+          <a:bodyPr wrap="square" lIns="0" tIns="0" rIns="0" bIns="0" rtlCol="0" anchor="ctr"/>
+          <a:lstStyle/>
+          <a:p>
+            <a:pPr indent="0" marL="0">
+              <a:buNone/>
+            </a:pPr>
+            <a:r>
+              <a:rPr lang="en-US" sz="2400" b="1" dirty="0">
+                <a:solidFill>
+                  <a:srgbClr val="FFFFFF"/>
+                </a:solidFill>
+                <a:latin typeface="Calibri" pitchFamily="34" charset="0"/>
+                <a:ea typeface="Calibri" pitchFamily="34" charset="-122"/>
+                <a:cs typeface="Calibri" pitchFamily="34" charset="-120"/>
+              </a:rPr>
+              <a:t>Payments Feature Schema for Foundation Model Training</a:t>
+            </a:r>
+            <a:endParaRPr lang="en-US" sz="2400" dirty="0"/>
+          </a:p>
+        </p:txBody>
+      </p:sp>
+      <p:sp>
+        <p:nvSpPr>
+          <p:cNvPr id="5" name="Text 3"/>
+          <p:cNvSpPr/>
+          <p:nvPr/>
+        </p:nvSpPr>
+        <p:spPr>
+          <a:xfrm>
+            <a:off x="256032" y="566928"/>
+            <a:ext cx="8686800" cy="347472"/>
+          </a:xfrm>
+          <a:prstGeom prst="rect">
+            <a:avLst/>
+          </a:prstGeom>
+          <a:noFill/>
+          <a:ln/>
+        </p:spPr>
+        <p:txBody>
+          <a:bodyPr wrap="square" lIns="0" tIns="0" rIns="0" bIns="0" rtlCol="0" anchor="ctr"/>
+          <a:lstStyle/>
+          <a:p>
+            <a:pPr indent="0" marL="0">
+              <a:buNone/>
+            </a:pPr>
+            <a:r>
+              <a:rPr lang="en-US" sz="1100" i="1" dirty="0">
+                <a:solidFill>
+                  <a:srgbClr val="C8DFFB"/>
+                </a:solidFill>
+                <a:latin typeface="Calibri" pitchFamily="34" charset="0"/>
+                <a:ea typeface="Calibri" pitchFamily="34" charset="-122"/>
+                <a:cs typeface="Calibri" pitchFamily="34" charset="-120"/>
+              </a:rPr>
+              <a:t>Six feature families compose the input vector for every transaction record — from entity tokens to graph topology.</a:t>
+            </a:r>
+            <a:endParaRPr lang="en-US" sz="1100" dirty="0"/>
+          </a:p>
+        </p:txBody>
+      </p:sp>
+      <p:sp>
+        <p:nvSpPr>
+          <p:cNvPr id="6" name="Shape 4"/>
+          <p:cNvSpPr/>
+          <p:nvPr/>
+        </p:nvSpPr>
+        <p:spPr>
+          <a:xfrm>
+            <a:off x="0" y="4887468"/>
+            <a:ext cx="9144000" cy="256032"/>
+          </a:xfrm>
+          <a:prstGeom prst="rect">
+            <a:avLst/>
+          </a:prstGeom>
+          <a:solidFill>
+            <a:srgbClr val="0A1C40"/>
+          </a:solidFill>
+          <a:ln w="12700">
+            <a:solidFill>
+              <a:srgbClr val="0A1C40"/>
+            </a:solidFill>
+            <a:prstDash val="solid"/>
+          </a:ln>
+        </p:spPr>
+      </p:sp>
+      <p:sp>
+        <p:nvSpPr>
+          <p:cNvPr id="7" name="Text 5"/>
+          <p:cNvSpPr/>
+          <p:nvPr/>
+        </p:nvSpPr>
+        <p:spPr>
+          <a:xfrm>
+            <a:off x="274320" y="4887468"/>
+            <a:ext cx="8595360" cy="256032"/>
+          </a:xfrm>
+          <a:prstGeom prst="rect">
+            <a:avLst/>
+          </a:prstGeom>
+          <a:noFill/>
+          <a:ln/>
+        </p:spPr>
+        <p:txBody>
+          <a:bodyPr wrap="square" lIns="0" tIns="0" rIns="0" bIns="0" rtlCol="0" anchor="ctr"/>
+          <a:lstStyle/>
+          <a:p>
+            <a:pPr indent="0" marL="0">
+              <a:buNone/>
+            </a:pPr>
+            <a:r>
+              <a:rPr lang="en-US" sz="800" dirty="0">
+                <a:solidFill>
+                  <a:srgbClr val="C8DFFB"/>
+                </a:solidFill>
+                <a:latin typeface="Calibri" pitchFamily="34" charset="0"/>
+                <a:ea typeface="Calibri" pitchFamily="34" charset="-122"/>
+                <a:cs typeface="Calibri" pitchFamily="34" charset="-120"/>
+              </a:rPr>
+              <a:t>Jack Henry &amp; Associates  ·  FY27 Initiatives  ·  Confidential</a:t>
+            </a:r>
+            <a:endParaRPr lang="en-US" sz="800" dirty="0"/>
+          </a:p>
+        </p:txBody>
+      </p:sp>
+      <p:sp>
+        <p:nvSpPr>
+          <p:cNvPr id="8" name="Shape 6"/>
+          <p:cNvSpPr/>
+          <p:nvPr/>
+        </p:nvSpPr>
+        <p:spPr>
+          <a:xfrm>
+            <a:off x="256032" y="1115568"/>
+            <a:ext cx="2706624" cy="1389888"/>
+          </a:xfrm>
+          <a:prstGeom prst="rect">
+            <a:avLst/>
+          </a:prstGeom>
+          <a:solidFill>
+            <a:srgbClr val="FFFFFF"/>
+          </a:solidFill>
+          <a:ln w="12700">
+            <a:solidFill>
+              <a:srgbClr val="DAEAF8"/>
+            </a:solidFill>
+            <a:prstDash val="solid"/>
+          </a:ln>
+          <a:effectLst>
+            <a:outerShdw sx="100000" sy="100000" kx="0" ky="0" algn="bl" rotWithShape="0" blurRad="63500" dist="25400" dir="8100000">
+              <a:srgbClr val="000000">
+                <a:alpha val="12000"/>
+              </a:srgbClr>
+            </a:outerShdw>
+          </a:effectLst>
+        </p:spPr>
+      </p:sp>
+      <p:sp>
+        <p:nvSpPr>
+          <p:cNvPr id="9" name="Shape 7"/>
+          <p:cNvSpPr/>
+          <p:nvPr/>
+        </p:nvSpPr>
+        <p:spPr>
+          <a:xfrm>
+            <a:off x="256032" y="1115568"/>
+            <a:ext cx="2706624" cy="384048"/>
+          </a:xfrm>
+          <a:prstGeom prst="rect">
+            <a:avLst/>
+          </a:prstGeom>
+          <a:solidFill>
+            <a:srgbClr val="A78BFA"/>
+          </a:solidFill>
+          <a:ln w="12700">
+            <a:solidFill>
+              <a:srgbClr val="A78BFA"/>
+            </a:solidFill>
+            <a:prstDash val="solid"/>
+          </a:ln>
+        </p:spPr>
+      </p:sp>
+      <p:sp>
+        <p:nvSpPr>
+          <p:cNvPr id="10" name="Shape 8"/>
+          <p:cNvSpPr/>
+          <p:nvPr/>
+        </p:nvSpPr>
+        <p:spPr>
+          <a:xfrm>
+            <a:off x="365760" y="1188720"/>
+            <a:ext cx="329184" cy="237744"/>
+          </a:xfrm>
+          <a:prstGeom prst="rect">
+            <a:avLst/>
+          </a:prstGeom>
+          <a:solidFill>
+            <a:srgbClr val="0A1C40"/>
+          </a:solidFill>
+          <a:ln w="12700">
+            <a:solidFill>
+              <a:srgbClr val="0A1C40"/>
+            </a:solidFill>
+            <a:prstDash val="solid"/>
+          </a:ln>
+        </p:spPr>
+      </p:sp>
+      <p:sp>
+        <p:nvSpPr>
+          <p:cNvPr id="11" name="Text 9"/>
+          <p:cNvSpPr/>
+          <p:nvPr/>
+        </p:nvSpPr>
+        <p:spPr>
+          <a:xfrm>
+            <a:off x="365760" y="1188720"/>
+            <a:ext cx="329184" cy="237744"/>
+          </a:xfrm>
+          <a:prstGeom prst="rect">
+            <a:avLst/>
+          </a:prstGeom>
+          <a:noFill/>
+          <a:ln/>
+        </p:spPr>
+        <p:txBody>
+          <a:bodyPr wrap="square" lIns="0" tIns="0" rIns="0" bIns="0" rtlCol="0" anchor="ctr"/>
+          <a:lstStyle/>
+          <a:p>
+            <a:pPr algn="ctr" indent="0" marL="0">
+              <a:buNone/>
+            </a:pPr>
+            <a:r>
+              <a:rPr lang="en-US" sz="750" b="1" dirty="0">
+                <a:solidFill>
+                  <a:srgbClr val="FFFFFF"/>
+                </a:solidFill>
+                <a:latin typeface="Calibri" pitchFamily="34" charset="0"/>
+                <a:ea typeface="Calibri" pitchFamily="34" charset="-122"/>
+                <a:cs typeface="Calibri" pitchFamily="34" charset="-120"/>
+              </a:rPr>
+              <a:t>ORG</a:t>
+            </a:r>
+            <a:endParaRPr lang="en-US" sz="750" dirty="0"/>
+          </a:p>
+        </p:txBody>
+      </p:sp>
+      <p:sp>
+        <p:nvSpPr>
+          <p:cNvPr id="12" name="Text 10"/>
+          <p:cNvSpPr/>
+          <p:nvPr/>
+        </p:nvSpPr>
+        <p:spPr>
+          <a:xfrm>
+            <a:off x="786384" y="1170432"/>
+            <a:ext cx="2066544" cy="201168"/>
+          </a:xfrm>
+          <a:prstGeom prst="rect">
+            <a:avLst/>
+          </a:prstGeom>
+          <a:noFill/>
+          <a:ln/>
+        </p:spPr>
+        <p:txBody>
+          <a:bodyPr wrap="square" lIns="0" tIns="0" rIns="0" bIns="0" rtlCol="0" anchor="ctr"/>
+          <a:lstStyle/>
+          <a:p>
+            <a:pPr indent="0" marL="0">
+              <a:buNone/>
+            </a:pPr>
+            <a:r>
+              <a:rPr lang="en-US" sz="1200" b="1" dirty="0">
+                <a:solidFill>
+                  <a:srgbClr val="0A1C40"/>
+                </a:solidFill>
+                <a:latin typeface="Calibri" pitchFamily="34" charset="0"/>
+                <a:ea typeface="Calibri" pitchFamily="34" charset="-122"/>
+                <a:cs typeface="Calibri" pitchFamily="34" charset="-120"/>
+              </a:rPr>
+              <a:t>Originator</a:t>
+            </a:r>
+            <a:endParaRPr lang="en-US" sz="1200" dirty="0"/>
+          </a:p>
+        </p:txBody>
+      </p:sp>
+      <p:sp>
+        <p:nvSpPr>
+          <p:cNvPr id="13" name="Text 11"/>
+          <p:cNvSpPr/>
+          <p:nvPr/>
+        </p:nvSpPr>
+        <p:spPr>
+          <a:xfrm>
+            <a:off x="786384" y="1362456"/>
+            <a:ext cx="2066544" cy="128016"/>
+          </a:xfrm>
+          <a:prstGeom prst="rect">
+            <a:avLst/>
+          </a:prstGeom>
+          <a:noFill/>
+          <a:ln/>
+        </p:spPr>
+        <p:txBody>
+          <a:bodyPr wrap="square" lIns="0" tIns="0" rIns="0" bIns="0" rtlCol="0" anchor="ctr"/>
+          <a:lstStyle/>
+          <a:p>
+            <a:pPr indent="0" marL="0">
+              <a:buNone/>
+            </a:pPr>
+            <a:r>
+              <a:rPr lang="en-US" sz="800" i="1" dirty="0">
+                <a:solidFill>
+                  <a:srgbClr val="0A1C40"/>
+                </a:solidFill>
+                <a:latin typeface="Calibri" pitchFamily="34" charset="0"/>
+                <a:ea typeface="Calibri" pitchFamily="34" charset="-122"/>
+                <a:cs typeface="Calibri" pitchFamily="34" charset="-120"/>
+              </a:rPr>
+              <a:t>Who sent it</a:t>
+            </a:r>
+            <a:endParaRPr lang="en-US" sz="800" dirty="0"/>
+          </a:p>
+        </p:txBody>
+      </p:sp>
+      <p:sp>
+        <p:nvSpPr>
+          <p:cNvPr id="14" name="Shape 12"/>
+          <p:cNvSpPr/>
+          <p:nvPr/>
+        </p:nvSpPr>
+        <p:spPr>
+          <a:xfrm>
+            <a:off x="384048" y="1618488"/>
+            <a:ext cx="54864" cy="73152"/>
+          </a:xfrm>
+          <a:prstGeom prst="rect">
+            <a:avLst/>
+          </a:prstGeom>
+          <a:solidFill>
+            <a:srgbClr val="A78BFA"/>
+          </a:solidFill>
+          <a:ln w="12700">
+            <a:solidFill>
+              <a:srgbClr val="A78BFA"/>
+            </a:solidFill>
+            <a:prstDash val="solid"/>
+          </a:ln>
+        </p:spPr>
+      </p:sp>
+      <p:sp>
+        <p:nvSpPr>
+          <p:cNvPr id="15" name="Text 13"/>
+          <p:cNvSpPr/>
+          <p:nvPr/>
+        </p:nvSpPr>
+        <p:spPr>
+          <a:xfrm>
+            <a:off x="502920" y="1554480"/>
+            <a:ext cx="2359152" cy="201168"/>
+          </a:xfrm>
+          <a:prstGeom prst="rect">
+            <a:avLst/>
+          </a:prstGeom>
+          <a:noFill/>
+          <a:ln/>
+        </p:spPr>
+        <p:txBody>
+          <a:bodyPr wrap="square" lIns="0" tIns="0" rIns="0" bIns="0" rtlCol="0" anchor="ctr"/>
+          <a:lstStyle/>
+          <a:p>
+            <a:pPr indent="0" marL="0">
+              <a:buNone/>
+            </a:pPr>
+            <a:r>
+              <a:rPr lang="en-US" sz="750" dirty="0">
+                <a:solidFill>
+                  <a:srgbClr val="3A5080"/>
+                </a:solidFill>
+                <a:latin typeface="Calibri" pitchFamily="34" charset="0"/>
+                <a:ea typeface="Calibri" pitchFamily="34" charset="-122"/>
+                <a:cs typeface="Calibri" pitchFamily="34" charset="-120"/>
+              </a:rPr>
+              <a:t>Entity token ID  —  stable numeric ID for embedding lookup</a:t>
+            </a:r>
+            <a:endParaRPr lang="en-US" sz="750" dirty="0"/>
+          </a:p>
+        </p:txBody>
+      </p:sp>
+      <p:sp>
+        <p:nvSpPr>
+          <p:cNvPr id="16" name="Shape 14"/>
+          <p:cNvSpPr/>
+          <p:nvPr/>
+        </p:nvSpPr>
+        <p:spPr>
+          <a:xfrm>
+            <a:off x="384048" y="1847088"/>
+            <a:ext cx="54864" cy="73152"/>
+          </a:xfrm>
+          <a:prstGeom prst="rect">
+            <a:avLst/>
+          </a:prstGeom>
+          <a:solidFill>
+            <a:srgbClr val="A78BFA"/>
+          </a:solidFill>
+          <a:ln w="12700">
+            <a:solidFill>
+              <a:srgbClr val="A78BFA"/>
+            </a:solidFill>
+            <a:prstDash val="solid"/>
+          </a:ln>
+        </p:spPr>
+      </p:sp>
+      <p:sp>
+        <p:nvSpPr>
+          <p:cNvPr id="17" name="Text 15"/>
+          <p:cNvSpPr/>
+          <p:nvPr/>
+        </p:nvSpPr>
+        <p:spPr>
+          <a:xfrm>
+            <a:off x="502920" y="1783080"/>
+            <a:ext cx="2359152" cy="201168"/>
+          </a:xfrm>
+          <a:prstGeom prst="rect">
+            <a:avLst/>
+          </a:prstGeom>
+          <a:noFill/>
+          <a:ln/>
+        </p:spPr>
+        <p:txBody>
+          <a:bodyPr wrap="square" lIns="0" tIns="0" rIns="0" bIns="0" rtlCol="0" anchor="ctr"/>
+          <a:lstStyle/>
+          <a:p>
+            <a:pPr indent="0" marL="0">
+              <a:buNone/>
+            </a:pPr>
+            <a:r>
+              <a:rPr lang="en-US" sz="750" dirty="0">
+                <a:solidFill>
+                  <a:srgbClr val="3A5080"/>
+                </a:solidFill>
+                <a:latin typeface="Calibri" pitchFamily="34" charset="0"/>
+                <a:ea typeface="Calibri" pitchFamily="34" charset="-122"/>
+                <a:cs typeface="Calibri" pitchFamily="34" charset="-120"/>
+              </a:rPr>
+              <a:t>Account type: checking / savings / business</a:t>
+            </a:r>
+            <a:endParaRPr lang="en-US" sz="750" dirty="0"/>
+          </a:p>
+        </p:txBody>
+      </p:sp>
+      <p:sp>
+        <p:nvSpPr>
+          <p:cNvPr id="18" name="Shape 16"/>
+          <p:cNvSpPr/>
+          <p:nvPr/>
+        </p:nvSpPr>
+        <p:spPr>
+          <a:xfrm>
+            <a:off x="384048" y="2075688"/>
+            <a:ext cx="54864" cy="73152"/>
+          </a:xfrm>
+          <a:prstGeom prst="rect">
+            <a:avLst/>
+          </a:prstGeom>
+          <a:solidFill>
+            <a:srgbClr val="A78BFA"/>
+          </a:solidFill>
+          <a:ln w="12700">
+            <a:solidFill>
+              <a:srgbClr val="A78BFA"/>
+            </a:solidFill>
+            <a:prstDash val="solid"/>
+          </a:ln>
+        </p:spPr>
+      </p:sp>
+      <p:sp>
+        <p:nvSpPr>
+          <p:cNvPr id="19" name="Text 17"/>
+          <p:cNvSpPr/>
+          <p:nvPr/>
+        </p:nvSpPr>
+        <p:spPr>
+          <a:xfrm>
+            <a:off x="502920" y="2011680"/>
+            <a:ext cx="2359152" cy="201168"/>
+          </a:xfrm>
+          <a:prstGeom prst="rect">
+            <a:avLst/>
+          </a:prstGeom>
+          <a:noFill/>
+          <a:ln/>
+        </p:spPr>
+        <p:txBody>
+          <a:bodyPr wrap="square" lIns="0" tIns="0" rIns="0" bIns="0" rtlCol="0" anchor="ctr"/>
+          <a:lstStyle/>
+          <a:p>
+            <a:pPr indent="0" marL="0">
+              <a:buNone/>
+            </a:pPr>
+            <a:r>
+              <a:rPr lang="en-US" sz="750" dirty="0">
+                <a:solidFill>
+                  <a:srgbClr val="3A5080"/>
+                </a:solidFill>
+                <a:latin typeface="Calibri" pitchFamily="34" charset="0"/>
+                <a:ea typeface="Calibri" pitchFamily="34" charset="-122"/>
+                <a:cs typeface="Calibri" pitchFamily="34" charset="-120"/>
+              </a:rPr>
+              <a:t>TX count: 30 / 90 / 180-day windows, by rail</a:t>
+            </a:r>
+            <a:endParaRPr lang="en-US" sz="750" dirty="0"/>
+          </a:p>
+        </p:txBody>
+      </p:sp>
+      <p:sp>
+        <p:nvSpPr>
+          <p:cNvPr id="20" name="Shape 18"/>
+          <p:cNvSpPr/>
+          <p:nvPr/>
+        </p:nvSpPr>
+        <p:spPr>
+          <a:xfrm>
+            <a:off x="384048" y="2304288"/>
+            <a:ext cx="54864" cy="73152"/>
+          </a:xfrm>
+          <a:prstGeom prst="rect">
+            <a:avLst/>
+          </a:prstGeom>
+          <a:solidFill>
+            <a:srgbClr val="A78BFA"/>
+          </a:solidFill>
+          <a:ln w="12700">
+            <a:solidFill>
+              <a:srgbClr val="A78BFA"/>
+            </a:solidFill>
+            <a:prstDash val="solid"/>
+          </a:ln>
+        </p:spPr>
+      </p:sp>
+      <p:sp>
+        <p:nvSpPr>
+          <p:cNvPr id="21" name="Text 19"/>
+          <p:cNvSpPr/>
+          <p:nvPr/>
+        </p:nvSpPr>
+        <p:spPr>
+          <a:xfrm>
+            <a:off x="502920" y="2240280"/>
+            <a:ext cx="2359152" cy="201168"/>
+          </a:xfrm>
+          <a:prstGeom prst="rect">
+            <a:avLst/>
+          </a:prstGeom>
+          <a:noFill/>
+          <a:ln/>
+        </p:spPr>
+        <p:txBody>
+          <a:bodyPr wrap="square" lIns="0" tIns="0" rIns="0" bIns="0" rtlCol="0" anchor="ctr"/>
+          <a:lstStyle/>
+          <a:p>
+            <a:pPr indent="0" marL="0">
+              <a:buNone/>
+            </a:pPr>
+            <a:r>
+              <a:rPr lang="en-US" sz="750" dirty="0">
+                <a:solidFill>
+                  <a:srgbClr val="3A5080"/>
+                </a:solidFill>
+                <a:latin typeface="Calibri" pitchFamily="34" charset="0"/>
+                <a:ea typeface="Calibri" pitchFamily="34" charset="-122"/>
+                <a:cs typeface="Calibri" pitchFamily="34" charset="-120"/>
+              </a:rPr>
+              <a:t>Unique destination count  (counterparty diversity)</a:t>
+            </a:r>
+            <a:endParaRPr lang="en-US" sz="750" dirty="0"/>
+          </a:p>
+        </p:txBody>
+      </p:sp>
+      <p:sp>
+        <p:nvSpPr>
+          <p:cNvPr id="22" name="Shape 20"/>
+          <p:cNvSpPr/>
+          <p:nvPr/>
+        </p:nvSpPr>
+        <p:spPr>
+          <a:xfrm>
+            <a:off x="3145536" y="1115568"/>
+            <a:ext cx="2706624" cy="1389888"/>
+          </a:xfrm>
+          <a:prstGeom prst="rect">
+            <a:avLst/>
+          </a:prstGeom>
+          <a:solidFill>
+            <a:srgbClr val="FFFFFF"/>
+          </a:solidFill>
+          <a:ln w="12700">
+            <a:solidFill>
+              <a:srgbClr val="DAEAF8"/>
+            </a:solidFill>
+            <a:prstDash val="solid"/>
+          </a:ln>
+          <a:effectLst>
+            <a:outerShdw sx="100000" sy="100000" kx="0" ky="0" algn="bl" rotWithShape="0" blurRad="63500" dist="25400" dir="8100000">
+              <a:srgbClr val="000000">
+                <a:alpha val="12000"/>
+              </a:srgbClr>
+            </a:outerShdw>
+          </a:effectLst>
+        </p:spPr>
+      </p:sp>
+      <p:sp>
+        <p:nvSpPr>
+          <p:cNvPr id="23" name="Shape 21"/>
+          <p:cNvSpPr/>
+          <p:nvPr/>
+        </p:nvSpPr>
+        <p:spPr>
+          <a:xfrm>
+            <a:off x="3145536" y="1115568"/>
+            <a:ext cx="2706624" cy="384048"/>
+          </a:xfrm>
+          <a:prstGeom prst="rect">
+            <a:avLst/>
+          </a:prstGeom>
+          <a:solidFill>
+            <a:srgbClr val="29A8E0"/>
+          </a:solidFill>
+          <a:ln w="12700">
+            <a:solidFill>
+              <a:srgbClr val="29A8E0"/>
+            </a:solidFill>
+            <a:prstDash val="solid"/>
+          </a:ln>
+        </p:spPr>
+      </p:sp>
+      <p:sp>
+        <p:nvSpPr>
+          <p:cNvPr id="24" name="Shape 22"/>
+          <p:cNvSpPr/>
+          <p:nvPr/>
+        </p:nvSpPr>
+        <p:spPr>
+          <a:xfrm>
+            <a:off x="3255264" y="1188720"/>
+            <a:ext cx="329184" cy="237744"/>
+          </a:xfrm>
+          <a:prstGeom prst="rect">
+            <a:avLst/>
+          </a:prstGeom>
+          <a:solidFill>
+            <a:srgbClr val="0A1C40"/>
+          </a:solidFill>
+          <a:ln w="12700">
+            <a:solidFill>
+              <a:srgbClr val="0A1C40"/>
+            </a:solidFill>
+            <a:prstDash val="solid"/>
+          </a:ln>
+        </p:spPr>
+      </p:sp>
+      <p:sp>
+        <p:nvSpPr>
+          <p:cNvPr id="25" name="Text 23"/>
+          <p:cNvSpPr/>
+          <p:nvPr/>
+        </p:nvSpPr>
+        <p:spPr>
+          <a:xfrm>
+            <a:off x="3255264" y="1188720"/>
+            <a:ext cx="329184" cy="237744"/>
+          </a:xfrm>
+          <a:prstGeom prst="rect">
+            <a:avLst/>
+          </a:prstGeom>
+          <a:noFill/>
+          <a:ln/>
+        </p:spPr>
+        <p:txBody>
+          <a:bodyPr wrap="square" lIns="0" tIns="0" rIns="0" bIns="0" rtlCol="0" anchor="ctr"/>
+          <a:lstStyle/>
+          <a:p>
+            <a:pPr algn="ctr" indent="0" marL="0">
+              <a:buNone/>
+            </a:pPr>
+            <a:r>
+              <a:rPr lang="en-US" sz="750" b="1" dirty="0">
+                <a:solidFill>
+                  <a:srgbClr val="FFFFFF"/>
+                </a:solidFill>
+                <a:latin typeface="Calibri" pitchFamily="34" charset="0"/>
+                <a:ea typeface="Calibri" pitchFamily="34" charset="-122"/>
+                <a:cs typeface="Calibri" pitchFamily="34" charset="-120"/>
+              </a:rPr>
+              <a:t>DST</a:t>
+            </a:r>
+            <a:endParaRPr lang="en-US" sz="750" dirty="0"/>
+          </a:p>
+        </p:txBody>
+      </p:sp>
+      <p:sp>
+        <p:nvSpPr>
+          <p:cNvPr id="26" name="Text 24"/>
+          <p:cNvSpPr/>
+          <p:nvPr/>
+        </p:nvSpPr>
+        <p:spPr>
+          <a:xfrm>
+            <a:off x="3675888" y="1170432"/>
+            <a:ext cx="2066544" cy="201168"/>
+          </a:xfrm>
+          <a:prstGeom prst="rect">
+            <a:avLst/>
+          </a:prstGeom>
+          <a:noFill/>
+          <a:ln/>
+        </p:spPr>
+        <p:txBody>
+          <a:bodyPr wrap="square" lIns="0" tIns="0" rIns="0" bIns="0" rtlCol="0" anchor="ctr"/>
+          <a:lstStyle/>
+          <a:p>
+            <a:pPr indent="0" marL="0">
+              <a:buNone/>
+            </a:pPr>
+            <a:r>
+              <a:rPr lang="en-US" sz="1200" b="1" dirty="0">
+                <a:solidFill>
+                  <a:srgbClr val="0A1C40"/>
+                </a:solidFill>
+                <a:latin typeface="Calibri" pitchFamily="34" charset="0"/>
+                <a:ea typeface="Calibri" pitchFamily="34" charset="-122"/>
+                <a:cs typeface="Calibri" pitchFamily="34" charset="-120"/>
+              </a:rPr>
+              <a:t>Destination</a:t>
+            </a:r>
+            <a:endParaRPr lang="en-US" sz="1200" dirty="0"/>
+          </a:p>
+        </p:txBody>
+      </p:sp>
+      <p:sp>
+        <p:nvSpPr>
+          <p:cNvPr id="27" name="Text 25"/>
+          <p:cNvSpPr/>
+          <p:nvPr/>
+        </p:nvSpPr>
+        <p:spPr>
+          <a:xfrm>
+            <a:off x="3675888" y="1362456"/>
+            <a:ext cx="2066544" cy="128016"/>
+          </a:xfrm>
+          <a:prstGeom prst="rect">
+            <a:avLst/>
+          </a:prstGeom>
+          <a:noFill/>
+          <a:ln/>
+        </p:spPr>
+        <p:txBody>
+          <a:bodyPr wrap="square" lIns="0" tIns="0" rIns="0" bIns="0" rtlCol="0" anchor="ctr"/>
+          <a:lstStyle/>
+          <a:p>
+            <a:pPr indent="0" marL="0">
+              <a:buNone/>
+            </a:pPr>
+            <a:r>
+              <a:rPr lang="en-US" sz="800" i="1" dirty="0">
+                <a:solidFill>
+                  <a:srgbClr val="0A1C40"/>
+                </a:solidFill>
+                <a:latin typeface="Calibri" pitchFamily="34" charset="0"/>
+                <a:ea typeface="Calibri" pitchFamily="34" charset="-122"/>
+                <a:cs typeface="Calibri" pitchFamily="34" charset="-120"/>
+              </a:rPr>
+              <a:t>Who received it</a:t>
+            </a:r>
+            <a:endParaRPr lang="en-US" sz="800" dirty="0"/>
+          </a:p>
+        </p:txBody>
+      </p:sp>
+      <p:sp>
+        <p:nvSpPr>
+          <p:cNvPr id="28" name="Shape 26"/>
+          <p:cNvSpPr/>
+          <p:nvPr/>
+        </p:nvSpPr>
+        <p:spPr>
+          <a:xfrm>
+            <a:off x="3273552" y="1618488"/>
+            <a:ext cx="54864" cy="73152"/>
+          </a:xfrm>
+          <a:prstGeom prst="rect">
+            <a:avLst/>
+          </a:prstGeom>
+          <a:solidFill>
+            <a:srgbClr val="29A8E0"/>
+          </a:solidFill>
+          <a:ln w="12700">
+            <a:solidFill>
+              <a:srgbClr val="29A8E0"/>
+            </a:solidFill>
+            <a:prstDash val="solid"/>
+          </a:ln>
+        </p:spPr>
+      </p:sp>
+      <p:sp>
+        <p:nvSpPr>
+          <p:cNvPr id="29" name="Text 27"/>
+          <p:cNvSpPr/>
+          <p:nvPr/>
+        </p:nvSpPr>
+        <p:spPr>
+          <a:xfrm>
+            <a:off x="3392424" y="1554480"/>
+            <a:ext cx="2359152" cy="201168"/>
+          </a:xfrm>
+          <a:prstGeom prst="rect">
+            <a:avLst/>
+          </a:prstGeom>
+          <a:noFill/>
+          <a:ln/>
+        </p:spPr>
+        <p:txBody>
+          <a:bodyPr wrap="square" lIns="0" tIns="0" rIns="0" bIns="0" rtlCol="0" anchor="ctr"/>
+          <a:lstStyle/>
+          <a:p>
+            <a:pPr indent="0" marL="0">
+              <a:buNone/>
+            </a:pPr>
+            <a:r>
+              <a:rPr lang="en-US" sz="750" dirty="0">
+                <a:solidFill>
+                  <a:srgbClr val="3A5080"/>
+                </a:solidFill>
+                <a:latin typeface="Calibri" pitchFamily="34" charset="0"/>
+                <a:ea typeface="Calibri" pitchFamily="34" charset="-122"/>
+                <a:cs typeface="Calibri" pitchFamily="34" charset="-120"/>
+              </a:rPr>
+              <a:t>Entity token ID  —  same stable-ID scheme as originator</a:t>
+            </a:r>
+            <a:endParaRPr lang="en-US" sz="750" dirty="0"/>
+          </a:p>
+        </p:txBody>
+      </p:sp>
+      <p:sp>
+        <p:nvSpPr>
+          <p:cNvPr id="30" name="Shape 28"/>
+          <p:cNvSpPr/>
+          <p:nvPr/>
+        </p:nvSpPr>
+        <p:spPr>
+          <a:xfrm>
+            <a:off x="3273552" y="1847088"/>
+            <a:ext cx="54864" cy="73152"/>
+          </a:xfrm>
+          <a:prstGeom prst="rect">
+            <a:avLst/>
+          </a:prstGeom>
+          <a:solidFill>
+            <a:srgbClr val="29A8E0"/>
+          </a:solidFill>
+          <a:ln w="12700">
+            <a:solidFill>
+              <a:srgbClr val="29A8E0"/>
+            </a:solidFill>
+            <a:prstDash val="solid"/>
+          </a:ln>
+        </p:spPr>
+      </p:sp>
+      <p:sp>
+        <p:nvSpPr>
+          <p:cNvPr id="31" name="Text 29"/>
+          <p:cNvSpPr/>
+          <p:nvPr/>
+        </p:nvSpPr>
+        <p:spPr>
+          <a:xfrm>
+            <a:off x="3392424" y="1783080"/>
+            <a:ext cx="2359152" cy="201168"/>
+          </a:xfrm>
+          <a:prstGeom prst="rect">
+            <a:avLst/>
+          </a:prstGeom>
+          <a:noFill/>
+          <a:ln/>
+        </p:spPr>
+        <p:txBody>
+          <a:bodyPr wrap="square" lIns="0" tIns="0" rIns="0" bIns="0" rtlCol="0" anchor="ctr"/>
+          <a:lstStyle/>
+          <a:p>
+            <a:pPr indent="0" marL="0">
+              <a:buNone/>
+            </a:pPr>
+            <a:r>
+              <a:rPr lang="en-US" sz="750" dirty="0">
+                <a:solidFill>
+                  <a:srgbClr val="3A5080"/>
+                </a:solidFill>
+                <a:latin typeface="Calibri" pitchFamily="34" charset="0"/>
+                <a:ea typeface="Calibri" pitchFamily="34" charset="-122"/>
+                <a:cs typeface="Calibri" pitchFamily="34" charset="-120"/>
+              </a:rPr>
+              <a:t>MCC / merchant category or FI type</a:t>
+            </a:r>
+            <a:endParaRPr lang="en-US" sz="750" dirty="0"/>
+          </a:p>
+        </p:txBody>
+      </p:sp>
+      <p:sp>
+        <p:nvSpPr>
+          <p:cNvPr id="32" name="Shape 30"/>
+          <p:cNvSpPr/>
+          <p:nvPr/>
+        </p:nvSpPr>
+        <p:spPr>
+          <a:xfrm>
+            <a:off x="3273552" y="2075688"/>
+            <a:ext cx="54864" cy="73152"/>
+          </a:xfrm>
+          <a:prstGeom prst="rect">
+            <a:avLst/>
+          </a:prstGeom>
+          <a:solidFill>
+            <a:srgbClr val="29A8E0"/>
+          </a:solidFill>
+          <a:ln w="12700">
+            <a:solidFill>
+              <a:srgbClr val="29A8E0"/>
+            </a:solidFill>
+            <a:prstDash val="solid"/>
+          </a:ln>
+        </p:spPr>
+      </p:sp>
+      <p:sp>
+        <p:nvSpPr>
+          <p:cNvPr id="33" name="Text 31"/>
+          <p:cNvSpPr/>
+          <p:nvPr/>
+        </p:nvSpPr>
+        <p:spPr>
+          <a:xfrm>
+            <a:off x="3392424" y="2011680"/>
+            <a:ext cx="2359152" cy="201168"/>
+          </a:xfrm>
+          <a:prstGeom prst="rect">
+            <a:avLst/>
+          </a:prstGeom>
+          <a:noFill/>
+          <a:ln/>
+        </p:spPr>
+        <p:txBody>
+          <a:bodyPr wrap="square" lIns="0" tIns="0" rIns="0" bIns="0" rtlCol="0" anchor="ctr"/>
+          <a:lstStyle/>
+          <a:p>
+            <a:pPr indent="0" marL="0">
+              <a:buNone/>
+            </a:pPr>
+            <a:r>
+              <a:rPr lang="en-US" sz="750" dirty="0">
+                <a:solidFill>
+                  <a:srgbClr val="3A5080"/>
+                </a:solidFill>
+                <a:latin typeface="Calibri" pitchFamily="34" charset="0"/>
+                <a:ea typeface="Calibri" pitchFamily="34" charset="-122"/>
+                <a:cs typeface="Calibri" pitchFamily="34" charset="-120"/>
+              </a:rPr>
+              <a:t>Rails accepted by this destination</a:t>
+            </a:r>
+            <a:endParaRPr lang="en-US" sz="750" dirty="0"/>
+          </a:p>
+        </p:txBody>
+      </p:sp>
+      <p:sp>
+        <p:nvSpPr>
+          <p:cNvPr id="34" name="Shape 32"/>
+          <p:cNvSpPr/>
+          <p:nvPr/>
+        </p:nvSpPr>
+        <p:spPr>
+          <a:xfrm>
+            <a:off x="3273552" y="2304288"/>
+            <a:ext cx="54864" cy="73152"/>
+          </a:xfrm>
+          <a:prstGeom prst="rect">
+            <a:avLst/>
+          </a:prstGeom>
+          <a:solidFill>
+            <a:srgbClr val="29A8E0"/>
+          </a:solidFill>
+          <a:ln w="12700">
+            <a:solidFill>
+              <a:srgbClr val="29A8E0"/>
+            </a:solidFill>
+            <a:prstDash val="solid"/>
+          </a:ln>
+        </p:spPr>
+      </p:sp>
+      <p:sp>
+        <p:nvSpPr>
+          <p:cNvPr id="35" name="Text 33"/>
+          <p:cNvSpPr/>
+          <p:nvPr/>
+        </p:nvSpPr>
+        <p:spPr>
+          <a:xfrm>
+            <a:off x="3392424" y="2240280"/>
+            <a:ext cx="2359152" cy="201168"/>
+          </a:xfrm>
+          <a:prstGeom prst="rect">
+            <a:avLst/>
+          </a:prstGeom>
+          <a:noFill/>
+          <a:ln/>
+        </p:spPr>
+        <p:txBody>
+          <a:bodyPr wrap="square" lIns="0" tIns="0" rIns="0" bIns="0" rtlCol="0" anchor="ctr"/>
+          <a:lstStyle/>
+          <a:p>
+            <a:pPr indent="0" marL="0">
+              <a:buNone/>
+            </a:pPr>
+            <a:r>
+              <a:rPr lang="en-US" sz="750" dirty="0">
+                <a:solidFill>
+                  <a:srgbClr val="3A5080"/>
+                </a:solidFill>
+                <a:latin typeface="Calibri" pitchFamily="34" charset="0"/>
+                <a:ea typeface="Calibri" pitchFamily="34" charset="-122"/>
+                <a:cs typeface="Calibri" pitchFamily="34" charset="-120"/>
+              </a:rPr>
+              <a:t>In-frequency as destination  (popularity signal)</a:t>
+            </a:r>
+            <a:endParaRPr lang="en-US" sz="750" dirty="0"/>
+          </a:p>
+        </p:txBody>
+      </p:sp>
+      <p:sp>
+        <p:nvSpPr>
+          <p:cNvPr id="36" name="Shape 34"/>
+          <p:cNvSpPr/>
+          <p:nvPr/>
+        </p:nvSpPr>
+        <p:spPr>
+          <a:xfrm>
+            <a:off x="6035040" y="1115568"/>
+            <a:ext cx="2706624" cy="1389888"/>
+          </a:xfrm>
+          <a:prstGeom prst="rect">
+            <a:avLst/>
+          </a:prstGeom>
+          <a:solidFill>
+            <a:srgbClr val="FFFFFF"/>
+          </a:solidFill>
+          <a:ln w="12700">
+            <a:solidFill>
+              <a:srgbClr val="DAEAF8"/>
+            </a:solidFill>
+            <a:prstDash val="solid"/>
+          </a:ln>
+          <a:effectLst>
+            <a:outerShdw sx="100000" sy="100000" kx="0" ky="0" algn="bl" rotWithShape="0" blurRad="63500" dist="25400" dir="8100000">
+              <a:srgbClr val="000000">
+                <a:alpha val="12000"/>
+              </a:srgbClr>
+            </a:outerShdw>
+          </a:effectLst>
+        </p:spPr>
+      </p:sp>
+      <p:sp>
+        <p:nvSpPr>
+          <p:cNvPr id="37" name="Shape 35"/>
+          <p:cNvSpPr/>
+          <p:nvPr/>
+        </p:nvSpPr>
+        <p:spPr>
+          <a:xfrm>
+            <a:off x="6035040" y="1115568"/>
+            <a:ext cx="2706624" cy="384048"/>
+          </a:xfrm>
+          <a:prstGeom prst="rect">
+            <a:avLst/>
+          </a:prstGeom>
+          <a:solidFill>
+            <a:srgbClr val="F5A623"/>
+          </a:solidFill>
+          <a:ln w="12700">
+            <a:solidFill>
+              <a:srgbClr val="F5A623"/>
+            </a:solidFill>
+            <a:prstDash val="solid"/>
+          </a:ln>
+        </p:spPr>
+      </p:sp>
+      <p:sp>
+        <p:nvSpPr>
+          <p:cNvPr id="38" name="Shape 36"/>
+          <p:cNvSpPr/>
+          <p:nvPr/>
+        </p:nvSpPr>
+        <p:spPr>
+          <a:xfrm>
+            <a:off x="6144768" y="1188720"/>
+            <a:ext cx="329184" cy="237744"/>
+          </a:xfrm>
+          <a:prstGeom prst="rect">
+            <a:avLst/>
+          </a:prstGeom>
+          <a:solidFill>
+            <a:srgbClr val="0A1C40"/>
+          </a:solidFill>
+          <a:ln w="12700">
+            <a:solidFill>
+              <a:srgbClr val="0A1C40"/>
+            </a:solidFill>
+            <a:prstDash val="solid"/>
+          </a:ln>
+        </p:spPr>
+      </p:sp>
+      <p:sp>
+        <p:nvSpPr>
+          <p:cNvPr id="39" name="Text 37"/>
+          <p:cNvSpPr/>
+          <p:nvPr/>
+        </p:nvSpPr>
+        <p:spPr>
+          <a:xfrm>
+            <a:off x="6144768" y="1188720"/>
+            <a:ext cx="329184" cy="237744"/>
+          </a:xfrm>
+          <a:prstGeom prst="rect">
+            <a:avLst/>
+          </a:prstGeom>
+          <a:noFill/>
+          <a:ln/>
+        </p:spPr>
+        <p:txBody>
+          <a:bodyPr wrap="square" lIns="0" tIns="0" rIns="0" bIns="0" rtlCol="0" anchor="ctr"/>
+          <a:lstStyle/>
+          <a:p>
+            <a:pPr algn="ctr" indent="0" marL="0">
+              <a:buNone/>
+            </a:pPr>
+            <a:r>
+              <a:rPr lang="en-US" sz="750" b="1" dirty="0">
+                <a:solidFill>
+                  <a:srgbClr val="FFFFFF"/>
+                </a:solidFill>
+                <a:latin typeface="Calibri" pitchFamily="34" charset="0"/>
+                <a:ea typeface="Calibri" pitchFamily="34" charset="-122"/>
+                <a:cs typeface="Calibri" pitchFamily="34" charset="-120"/>
+              </a:rPr>
+              <a:t>RAL</a:t>
+            </a:r>
+            <a:endParaRPr lang="en-US" sz="750" dirty="0"/>
+          </a:p>
+        </p:txBody>
+      </p:sp>
+      <p:sp>
+        <p:nvSpPr>
+          <p:cNvPr id="40" name="Text 38"/>
+          <p:cNvSpPr/>
+          <p:nvPr/>
+        </p:nvSpPr>
+        <p:spPr>
+          <a:xfrm>
+            <a:off x="6565392" y="1170432"/>
+            <a:ext cx="2066544" cy="201168"/>
+          </a:xfrm>
+          <a:prstGeom prst="rect">
+            <a:avLst/>
+          </a:prstGeom>
+          <a:noFill/>
+          <a:ln/>
+        </p:spPr>
+        <p:txBody>
+          <a:bodyPr wrap="square" lIns="0" tIns="0" rIns="0" bIns="0" rtlCol="0" anchor="ctr"/>
+          <a:lstStyle/>
+          <a:p>
+            <a:pPr indent="0" marL="0">
+              <a:buNone/>
+            </a:pPr>
+            <a:r>
+              <a:rPr lang="en-US" sz="1200" b="1" dirty="0">
+                <a:solidFill>
+                  <a:srgbClr val="0A1C40"/>
+                </a:solidFill>
+                <a:latin typeface="Calibri" pitchFamily="34" charset="0"/>
+                <a:ea typeface="Calibri" pitchFamily="34" charset="-122"/>
+                <a:cs typeface="Calibri" pitchFamily="34" charset="-120"/>
+              </a:rPr>
+              <a:t>Rail &amp; Type</a:t>
+            </a:r>
+            <a:endParaRPr lang="en-US" sz="1200" dirty="0"/>
+          </a:p>
+        </p:txBody>
+      </p:sp>
+      <p:sp>
+        <p:nvSpPr>
+          <p:cNvPr id="41" name="Text 39"/>
+          <p:cNvSpPr/>
+          <p:nvPr/>
+        </p:nvSpPr>
+        <p:spPr>
+          <a:xfrm>
+            <a:off x="6565392" y="1362456"/>
+            <a:ext cx="2066544" cy="128016"/>
+          </a:xfrm>
+          <a:prstGeom prst="rect">
+            <a:avLst/>
+          </a:prstGeom>
+          <a:noFill/>
+          <a:ln/>
+        </p:spPr>
+        <p:txBody>
+          <a:bodyPr wrap="square" lIns="0" tIns="0" rIns="0" bIns="0" rtlCol="0" anchor="ctr"/>
+          <a:lstStyle/>
+          <a:p>
+            <a:pPr indent="0" marL="0">
+              <a:buNone/>
+            </a:pPr>
+            <a:r>
+              <a:rPr lang="en-US" sz="800" i="1" dirty="0">
+                <a:solidFill>
+                  <a:srgbClr val="0A1C40"/>
+                </a:solidFill>
+                <a:latin typeface="Calibri" pitchFamily="34" charset="0"/>
+                <a:ea typeface="Calibri" pitchFamily="34" charset="-122"/>
+                <a:cs typeface="Calibri" pitchFamily="34" charset="-120"/>
+              </a:rPr>
+              <a:t>How it traveled</a:t>
+            </a:r>
+            <a:endParaRPr lang="en-US" sz="800" dirty="0"/>
+          </a:p>
+        </p:txBody>
+      </p:sp>
+      <p:sp>
+        <p:nvSpPr>
+          <p:cNvPr id="42" name="Shape 40"/>
+          <p:cNvSpPr/>
+          <p:nvPr/>
+        </p:nvSpPr>
+        <p:spPr>
+          <a:xfrm>
+            <a:off x="6163056" y="1618488"/>
+            <a:ext cx="54864" cy="73152"/>
+          </a:xfrm>
+          <a:prstGeom prst="rect">
+            <a:avLst/>
+          </a:prstGeom>
+          <a:solidFill>
+            <a:srgbClr val="F5A623"/>
+          </a:solidFill>
+          <a:ln w="12700">
+            <a:solidFill>
+              <a:srgbClr val="F5A623"/>
+            </a:solidFill>
+            <a:prstDash val="solid"/>
+          </a:ln>
+        </p:spPr>
+      </p:sp>
+      <p:sp>
+        <p:nvSpPr>
+          <p:cNvPr id="43" name="Text 41"/>
+          <p:cNvSpPr/>
+          <p:nvPr/>
+        </p:nvSpPr>
+        <p:spPr>
+          <a:xfrm>
+            <a:off x="6281928" y="1554480"/>
+            <a:ext cx="2359152" cy="201168"/>
+          </a:xfrm>
+          <a:prstGeom prst="rect">
+            <a:avLst/>
+          </a:prstGeom>
+          <a:noFill/>
+          <a:ln/>
+        </p:spPr>
+        <p:txBody>
+          <a:bodyPr wrap="square" lIns="0" tIns="0" rIns="0" bIns="0" rtlCol="0" anchor="ctr"/>
+          <a:lstStyle/>
+          <a:p>
+            <a:pPr indent="0" marL="0">
+              <a:buNone/>
+            </a:pPr>
+            <a:r>
+              <a:rPr lang="en-US" sz="750" dirty="0">
+                <a:solidFill>
+                  <a:srgbClr val="3A5080"/>
+                </a:solidFill>
+                <a:latin typeface="Calibri" pitchFamily="34" charset="0"/>
+                <a:ea typeface="Calibri" pitchFamily="34" charset="-122"/>
+                <a:cs typeface="Calibri" pitchFamily="34" charset="-120"/>
+              </a:rPr>
+              <a:t>Rail: ACH · Wire · RTP · FedNow · Zelle · Card</a:t>
+            </a:r>
+            <a:endParaRPr lang="en-US" sz="750" dirty="0"/>
+          </a:p>
+        </p:txBody>
+      </p:sp>
+      <p:sp>
+        <p:nvSpPr>
+          <p:cNvPr id="44" name="Shape 42"/>
+          <p:cNvSpPr/>
+          <p:nvPr/>
+        </p:nvSpPr>
+        <p:spPr>
+          <a:xfrm>
+            <a:off x="6163056" y="1847088"/>
+            <a:ext cx="54864" cy="73152"/>
+          </a:xfrm>
+          <a:prstGeom prst="rect">
+            <a:avLst/>
+          </a:prstGeom>
+          <a:solidFill>
+            <a:srgbClr val="F5A623"/>
+          </a:solidFill>
+          <a:ln w="12700">
+            <a:solidFill>
+              <a:srgbClr val="F5A623"/>
+            </a:solidFill>
+            <a:prstDash val="solid"/>
+          </a:ln>
+        </p:spPr>
+      </p:sp>
+      <p:sp>
+        <p:nvSpPr>
+          <p:cNvPr id="45" name="Text 43"/>
+          <p:cNvSpPr/>
+          <p:nvPr/>
+        </p:nvSpPr>
+        <p:spPr>
+          <a:xfrm>
+            <a:off x="6281928" y="1783080"/>
+            <a:ext cx="2359152" cy="201168"/>
+          </a:xfrm>
+          <a:prstGeom prst="rect">
+            <a:avLst/>
+          </a:prstGeom>
+          <a:noFill/>
+          <a:ln/>
+        </p:spPr>
+        <p:txBody>
+          <a:bodyPr wrap="square" lIns="0" tIns="0" rIns="0" bIns="0" rtlCol="0" anchor="ctr"/>
+          <a:lstStyle/>
+          <a:p>
+            <a:pPr indent="0" marL="0">
+              <a:buNone/>
+            </a:pPr>
+            <a:r>
+              <a:rPr lang="en-US" sz="750" dirty="0">
+                <a:solidFill>
+                  <a:srgbClr val="3A5080"/>
+                </a:solidFill>
+                <a:latin typeface="Calibri" pitchFamily="34" charset="0"/>
+                <a:ea typeface="Calibri" pitchFamily="34" charset="-122"/>
+                <a:cs typeface="Calibri" pitchFamily="34" charset="-120"/>
+              </a:rPr>
+              <a:t>Credit vs Debit · Push vs Pull</a:t>
+            </a:r>
+            <a:endParaRPr lang="en-US" sz="750" dirty="0"/>
+          </a:p>
+        </p:txBody>
+      </p:sp>
+      <p:sp>
+        <p:nvSpPr>
+          <p:cNvPr id="46" name="Shape 44"/>
+          <p:cNvSpPr/>
+          <p:nvPr/>
+        </p:nvSpPr>
+        <p:spPr>
+          <a:xfrm>
+            <a:off x="6163056" y="2075688"/>
+            <a:ext cx="54864" cy="73152"/>
+          </a:xfrm>
+          <a:prstGeom prst="rect">
+            <a:avLst/>
+          </a:prstGeom>
+          <a:solidFill>
+            <a:srgbClr val="F5A623"/>
+          </a:solidFill>
+          <a:ln w="12700">
+            <a:solidFill>
+              <a:srgbClr val="F5A623"/>
+            </a:solidFill>
+            <a:prstDash val="solid"/>
+          </a:ln>
+        </p:spPr>
+      </p:sp>
+      <p:sp>
+        <p:nvSpPr>
+          <p:cNvPr id="47" name="Text 45"/>
+          <p:cNvSpPr/>
+          <p:nvPr/>
+        </p:nvSpPr>
+        <p:spPr>
+          <a:xfrm>
+            <a:off x="6281928" y="2011680"/>
+            <a:ext cx="2359152" cy="201168"/>
+          </a:xfrm>
+          <a:prstGeom prst="rect">
+            <a:avLst/>
+          </a:prstGeom>
+          <a:noFill/>
+          <a:ln/>
+        </p:spPr>
+        <p:txBody>
+          <a:bodyPr wrap="square" lIns="0" tIns="0" rIns="0" bIns="0" rtlCol="0" anchor="ctr"/>
+          <a:lstStyle/>
+          <a:p>
+            <a:pPr indent="0" marL="0">
+              <a:buNone/>
+            </a:pPr>
+            <a:r>
+              <a:rPr lang="en-US" sz="750" dirty="0">
+                <a:solidFill>
+                  <a:srgbClr val="3A5080"/>
+                </a:solidFill>
+                <a:latin typeface="Calibri" pitchFamily="34" charset="0"/>
+                <a:ea typeface="Calibri" pitchFamily="34" charset="-122"/>
+                <a:cs typeface="Calibri" pitchFamily="34" charset="-120"/>
+              </a:rPr>
+              <a:t>Same-day vs standard · Individual vs batch</a:t>
+            </a:r>
+            <a:endParaRPr lang="en-US" sz="750" dirty="0"/>
+          </a:p>
+        </p:txBody>
+      </p:sp>
+      <p:sp>
+        <p:nvSpPr>
+          <p:cNvPr id="48" name="Shape 46"/>
+          <p:cNvSpPr/>
+          <p:nvPr/>
+        </p:nvSpPr>
+        <p:spPr>
+          <a:xfrm>
+            <a:off x="6163056" y="2304288"/>
+            <a:ext cx="54864" cy="73152"/>
+          </a:xfrm>
+          <a:prstGeom prst="rect">
+            <a:avLst/>
+          </a:prstGeom>
+          <a:solidFill>
+            <a:srgbClr val="F5A623"/>
+          </a:solidFill>
+          <a:ln w="12700">
+            <a:solidFill>
+              <a:srgbClr val="F5A623"/>
+            </a:solidFill>
+            <a:prstDash val="solid"/>
+          </a:ln>
+        </p:spPr>
+      </p:sp>
+      <p:sp>
+        <p:nvSpPr>
+          <p:cNvPr id="49" name="Text 47"/>
+          <p:cNvSpPr/>
+          <p:nvPr/>
+        </p:nvSpPr>
+        <p:spPr>
+          <a:xfrm>
+            <a:off x="6281928" y="2240280"/>
+            <a:ext cx="2359152" cy="201168"/>
+          </a:xfrm>
+          <a:prstGeom prst="rect">
+            <a:avLst/>
+          </a:prstGeom>
+          <a:noFill/>
+          <a:ln/>
+        </p:spPr>
+        <p:txBody>
+          <a:bodyPr wrap="square" lIns="0" tIns="0" rIns="0" bIns="0" rtlCol="0" anchor="ctr"/>
+          <a:lstStyle/>
+          <a:p>
+            <a:pPr indent="0" marL="0">
+              <a:buNone/>
+            </a:pPr>
+            <a:r>
+              <a:rPr lang="en-US" sz="750" dirty="0">
+                <a:solidFill>
+                  <a:srgbClr val="3A5080"/>
+                </a:solidFill>
+                <a:latin typeface="Calibri" pitchFamily="34" charset="0"/>
+                <a:ea typeface="Calibri" pitchFamily="34" charset="-122"/>
+                <a:cs typeface="Calibri" pitchFamily="34" charset="-120"/>
+              </a:rPr>
+              <a:t>Reversal flag · Return / NOC code</a:t>
+            </a:r>
+            <a:endParaRPr lang="en-US" sz="750" dirty="0"/>
+          </a:p>
+        </p:txBody>
+      </p:sp>
+      <p:sp>
+        <p:nvSpPr>
+          <p:cNvPr id="50" name="Shape 48"/>
+          <p:cNvSpPr/>
+          <p:nvPr/>
+        </p:nvSpPr>
+        <p:spPr>
+          <a:xfrm>
+            <a:off x="256032" y="2615184"/>
+            <a:ext cx="2706624" cy="1389888"/>
+          </a:xfrm>
+          <a:prstGeom prst="rect">
+            <a:avLst/>
+          </a:prstGeom>
+          <a:solidFill>
+            <a:srgbClr val="FFFFFF"/>
+          </a:solidFill>
+          <a:ln w="12700">
+            <a:solidFill>
+              <a:srgbClr val="DAEAF8"/>
+            </a:solidFill>
+            <a:prstDash val="solid"/>
+          </a:ln>
+          <a:effectLst>
+            <a:outerShdw sx="100000" sy="100000" kx="0" ky="0" algn="bl" rotWithShape="0" blurRad="63500" dist="25400" dir="8100000">
+              <a:srgbClr val="000000">
+                <a:alpha val="12000"/>
+              </a:srgbClr>
+            </a:outerShdw>
+          </a:effectLst>
+        </p:spPr>
+      </p:sp>
+      <p:sp>
+        <p:nvSpPr>
+          <p:cNvPr id="51" name="Shape 49"/>
+          <p:cNvSpPr/>
+          <p:nvPr/>
+        </p:nvSpPr>
+        <p:spPr>
+          <a:xfrm>
+            <a:off x="256032" y="2615184"/>
+            <a:ext cx="2706624" cy="384048"/>
+          </a:xfrm>
+          <a:prstGeom prst="rect">
+            <a:avLst/>
+          </a:prstGeom>
+          <a:solidFill>
+            <a:srgbClr val="FB923C"/>
+          </a:solidFill>
+          <a:ln w="12700">
+            <a:solidFill>
+              <a:srgbClr val="FB923C"/>
+            </a:solidFill>
+            <a:prstDash val="solid"/>
+          </a:ln>
+        </p:spPr>
+      </p:sp>
+      <p:sp>
+        <p:nvSpPr>
+          <p:cNvPr id="52" name="Shape 50"/>
+          <p:cNvSpPr/>
+          <p:nvPr/>
+        </p:nvSpPr>
+        <p:spPr>
+          <a:xfrm>
+            <a:off x="365760" y="2688336"/>
+            <a:ext cx="329184" cy="237744"/>
+          </a:xfrm>
+          <a:prstGeom prst="rect">
+            <a:avLst/>
+          </a:prstGeom>
+          <a:solidFill>
+            <a:srgbClr val="0A1C40"/>
+          </a:solidFill>
+          <a:ln w="12700">
+            <a:solidFill>
+              <a:srgbClr val="0A1C40"/>
+            </a:solidFill>
+            <a:prstDash val="solid"/>
+          </a:ln>
+        </p:spPr>
+      </p:sp>
+      <p:sp>
+        <p:nvSpPr>
+          <p:cNvPr id="53" name="Text 51"/>
+          <p:cNvSpPr/>
+          <p:nvPr/>
+        </p:nvSpPr>
+        <p:spPr>
+          <a:xfrm>
+            <a:off x="365760" y="2688336"/>
+            <a:ext cx="329184" cy="237744"/>
+          </a:xfrm>
+          <a:prstGeom prst="rect">
+            <a:avLst/>
+          </a:prstGeom>
+          <a:noFill/>
+          <a:ln/>
+        </p:spPr>
+        <p:txBody>
+          <a:bodyPr wrap="square" lIns="0" tIns="0" rIns="0" bIns="0" rtlCol="0" anchor="ctr"/>
+          <a:lstStyle/>
+          <a:p>
+            <a:pPr algn="ctr" indent="0" marL="0">
+              <a:buNone/>
+            </a:pPr>
+            <a:r>
+              <a:rPr lang="en-US" sz="750" b="1" dirty="0">
+                <a:solidFill>
+                  <a:srgbClr val="FFFFFF"/>
+                </a:solidFill>
+                <a:latin typeface="Calibri" pitchFamily="34" charset="0"/>
+                <a:ea typeface="Calibri" pitchFamily="34" charset="-122"/>
+                <a:cs typeface="Calibri" pitchFamily="34" charset="-120"/>
+              </a:rPr>
+              <a:t>AMT</a:t>
+            </a:r>
+            <a:endParaRPr lang="en-US" sz="750" dirty="0"/>
+          </a:p>
+        </p:txBody>
+      </p:sp>
+      <p:sp>
+        <p:nvSpPr>
+          <p:cNvPr id="54" name="Text 52"/>
+          <p:cNvSpPr/>
+          <p:nvPr/>
+        </p:nvSpPr>
+        <p:spPr>
+          <a:xfrm>
+            <a:off x="786384" y="2670048"/>
+            <a:ext cx="2066544" cy="201168"/>
+          </a:xfrm>
+          <a:prstGeom prst="rect">
+            <a:avLst/>
+          </a:prstGeom>
+          <a:noFill/>
+          <a:ln/>
+        </p:spPr>
+        <p:txBody>
+          <a:bodyPr wrap="square" lIns="0" tIns="0" rIns="0" bIns="0" rtlCol="0" anchor="ctr"/>
+          <a:lstStyle/>
+          <a:p>
+            <a:pPr indent="0" marL="0">
+              <a:buNone/>
+            </a:pPr>
+            <a:r>
+              <a:rPr lang="en-US" sz="1200" b="1" dirty="0">
+                <a:solidFill>
+                  <a:srgbClr val="0A1C40"/>
+                </a:solidFill>
+                <a:latin typeface="Calibri" pitchFamily="34" charset="0"/>
+                <a:ea typeface="Calibri" pitchFamily="34" charset="-122"/>
+                <a:cs typeface="Calibri" pitchFamily="34" charset="-120"/>
+              </a:rPr>
+              <a:t>Amount</a:t>
+            </a:r>
+            <a:endParaRPr lang="en-US" sz="1200" dirty="0"/>
+          </a:p>
+        </p:txBody>
+      </p:sp>
+      <p:sp>
+        <p:nvSpPr>
+          <p:cNvPr id="55" name="Text 53"/>
+          <p:cNvSpPr/>
+          <p:nvPr/>
+        </p:nvSpPr>
+        <p:spPr>
+          <a:xfrm>
+            <a:off x="786384" y="2862072"/>
+            <a:ext cx="2066544" cy="128016"/>
+          </a:xfrm>
+          <a:prstGeom prst="rect">
+            <a:avLst/>
+          </a:prstGeom>
+          <a:noFill/>
+          <a:ln/>
+        </p:spPr>
+        <p:txBody>
+          <a:bodyPr wrap="square" lIns="0" tIns="0" rIns="0" bIns="0" rtlCol="0" anchor="ctr"/>
+          <a:lstStyle/>
+          <a:p>
+            <a:pPr indent="0" marL="0">
+              <a:buNone/>
+            </a:pPr>
+            <a:r>
+              <a:rPr lang="en-US" sz="800" i="1" dirty="0">
+                <a:solidFill>
+                  <a:srgbClr val="0A1C40"/>
+                </a:solidFill>
+                <a:latin typeface="Calibri" pitchFamily="34" charset="0"/>
+                <a:ea typeface="Calibri" pitchFamily="34" charset="-122"/>
+                <a:cs typeface="Calibri" pitchFamily="34" charset="-120"/>
+              </a:rPr>
+              <a:t>How much</a:t>
+            </a:r>
+            <a:endParaRPr lang="en-US" sz="800" dirty="0"/>
+          </a:p>
+        </p:txBody>
+      </p:sp>
+      <p:sp>
+        <p:nvSpPr>
+          <p:cNvPr id="56" name="Shape 54"/>
+          <p:cNvSpPr/>
+          <p:nvPr/>
+        </p:nvSpPr>
+        <p:spPr>
+          <a:xfrm>
+            <a:off x="384048" y="3118104"/>
+            <a:ext cx="54864" cy="73152"/>
+          </a:xfrm>
+          <a:prstGeom prst="rect">
+            <a:avLst/>
+          </a:prstGeom>
+          <a:solidFill>
+            <a:srgbClr val="FB923C"/>
+          </a:solidFill>
+          <a:ln w="12700">
+            <a:solidFill>
+              <a:srgbClr val="FB923C"/>
+            </a:solidFill>
+            <a:prstDash val="solid"/>
+          </a:ln>
+        </p:spPr>
+      </p:sp>
+      <p:sp>
+        <p:nvSpPr>
+          <p:cNvPr id="57" name="Text 55"/>
+          <p:cNvSpPr/>
+          <p:nvPr/>
+        </p:nvSpPr>
+        <p:spPr>
+          <a:xfrm>
+            <a:off x="502920" y="3054096"/>
+            <a:ext cx="2359152" cy="201168"/>
+          </a:xfrm>
+          <a:prstGeom prst="rect">
+            <a:avLst/>
+          </a:prstGeom>
+          <a:noFill/>
+          <a:ln/>
+        </p:spPr>
+        <p:txBody>
+          <a:bodyPr wrap="square" lIns="0" tIns="0" rIns="0" bIns="0" rtlCol="0" anchor="ctr"/>
+          <a:lstStyle/>
+          <a:p>
+            <a:pPr indent="0" marL="0">
+              <a:buNone/>
+            </a:pPr>
+            <a:r>
+              <a:rPr lang="en-US" sz="750" dirty="0">
+                <a:solidFill>
+                  <a:srgbClr val="3A5080"/>
+                </a:solidFill>
+                <a:latin typeface="Calibri" pitchFamily="34" charset="0"/>
+                <a:ea typeface="Calibri" pitchFamily="34" charset="-122"/>
+                <a:cs typeface="Calibri" pitchFamily="34" charset="-120"/>
+              </a:rPr>
+              <a:t>Raw amount (USD)</a:t>
+            </a:r>
+            <a:endParaRPr lang="en-US" sz="750" dirty="0"/>
+          </a:p>
+        </p:txBody>
+      </p:sp>
+      <p:sp>
+        <p:nvSpPr>
+          <p:cNvPr id="58" name="Shape 56"/>
+          <p:cNvSpPr/>
+          <p:nvPr/>
+        </p:nvSpPr>
+        <p:spPr>
+          <a:xfrm>
+            <a:off x="384048" y="3346704"/>
+            <a:ext cx="54864" cy="73152"/>
+          </a:xfrm>
+          <a:prstGeom prst="rect">
+            <a:avLst/>
+          </a:prstGeom>
+          <a:solidFill>
+            <a:srgbClr val="FB923C"/>
+          </a:solidFill>
+          <a:ln w="12700">
+            <a:solidFill>
+              <a:srgbClr val="FB923C"/>
+            </a:solidFill>
+            <a:prstDash val="solid"/>
+          </a:ln>
+        </p:spPr>
+      </p:sp>
+      <p:sp>
+        <p:nvSpPr>
+          <p:cNvPr id="59" name="Text 57"/>
+          <p:cNvSpPr/>
+          <p:nvPr/>
+        </p:nvSpPr>
+        <p:spPr>
+          <a:xfrm>
+            <a:off x="502920" y="3282696"/>
+            <a:ext cx="2359152" cy="201168"/>
+          </a:xfrm>
+          <a:prstGeom prst="rect">
+            <a:avLst/>
+          </a:prstGeom>
+          <a:noFill/>
+          <a:ln/>
+        </p:spPr>
+        <p:txBody>
+          <a:bodyPr wrap="square" lIns="0" tIns="0" rIns="0" bIns="0" rtlCol="0" anchor="ctr"/>
+          <a:lstStyle/>
+          <a:p>
+            <a:pPr indent="0" marL="0">
+              <a:buNone/>
+            </a:pPr>
+            <a:r>
+              <a:rPr lang="en-US" sz="750" dirty="0">
+                <a:solidFill>
+                  <a:srgbClr val="3A5080"/>
+                </a:solidFill>
+                <a:latin typeface="Calibri" pitchFamily="34" charset="0"/>
+                <a:ea typeface="Calibri" pitchFamily="34" charset="-122"/>
+                <a:cs typeface="Calibri" pitchFamily="34" charset="-120"/>
+              </a:rPr>
+              <a:t>Log-normalized · Z-score vs originator 90d history</a:t>
+            </a:r>
+            <a:endParaRPr lang="en-US" sz="750" dirty="0"/>
+          </a:p>
+        </p:txBody>
+      </p:sp>
+      <p:sp>
+        <p:nvSpPr>
+          <p:cNvPr id="60" name="Shape 58"/>
+          <p:cNvSpPr/>
+          <p:nvPr/>
+        </p:nvSpPr>
+        <p:spPr>
+          <a:xfrm>
+            <a:off x="384048" y="3575304"/>
+            <a:ext cx="54864" cy="73152"/>
+          </a:xfrm>
+          <a:prstGeom prst="rect">
+            <a:avLst/>
+          </a:prstGeom>
+          <a:solidFill>
+            <a:srgbClr val="FB923C"/>
+          </a:solidFill>
+          <a:ln w="12700">
+            <a:solidFill>
+              <a:srgbClr val="FB923C"/>
+            </a:solidFill>
+            <a:prstDash val="solid"/>
+          </a:ln>
+        </p:spPr>
+      </p:sp>
+      <p:sp>
+        <p:nvSpPr>
+          <p:cNvPr id="61" name="Text 59"/>
+          <p:cNvSpPr/>
+          <p:nvPr/>
+        </p:nvSpPr>
+        <p:spPr>
+          <a:xfrm>
+            <a:off x="502920" y="3511296"/>
+            <a:ext cx="2359152" cy="201168"/>
+          </a:xfrm>
+          <a:prstGeom prst="rect">
+            <a:avLst/>
+          </a:prstGeom>
+          <a:noFill/>
+          <a:ln/>
+        </p:spPr>
+        <p:txBody>
+          <a:bodyPr wrap="square" lIns="0" tIns="0" rIns="0" bIns="0" rtlCol="0" anchor="ctr"/>
+          <a:lstStyle/>
+          <a:p>
+            <a:pPr indent="0" marL="0">
+              <a:buNone/>
+            </a:pPr>
+            <a:r>
+              <a:rPr lang="en-US" sz="750" dirty="0">
+                <a:solidFill>
+                  <a:srgbClr val="3A5080"/>
+                </a:solidFill>
+                <a:latin typeface="Calibri" pitchFamily="34" charset="0"/>
+                <a:ea typeface="Calibri" pitchFamily="34" charset="-122"/>
+                <a:cs typeface="Calibri" pitchFamily="34" charset="-120"/>
+              </a:rPr>
+              <a:t>Percentile rank vs rail baseline</a:t>
+            </a:r>
+            <a:endParaRPr lang="en-US" sz="750" dirty="0"/>
+          </a:p>
+        </p:txBody>
+      </p:sp>
+      <p:sp>
+        <p:nvSpPr>
+          <p:cNvPr id="62" name="Shape 60"/>
+          <p:cNvSpPr/>
+          <p:nvPr/>
+        </p:nvSpPr>
+        <p:spPr>
+          <a:xfrm>
+            <a:off x="384048" y="3803904"/>
+            <a:ext cx="54864" cy="73152"/>
+          </a:xfrm>
+          <a:prstGeom prst="rect">
+            <a:avLst/>
+          </a:prstGeom>
+          <a:solidFill>
+            <a:srgbClr val="FB923C"/>
+          </a:solidFill>
+          <a:ln w="12700">
+            <a:solidFill>
+              <a:srgbClr val="FB923C"/>
+            </a:solidFill>
+            <a:prstDash val="solid"/>
+          </a:ln>
+        </p:spPr>
+      </p:sp>
+      <p:sp>
+        <p:nvSpPr>
+          <p:cNvPr id="63" name="Text 61"/>
+          <p:cNvSpPr/>
+          <p:nvPr/>
+        </p:nvSpPr>
+        <p:spPr>
+          <a:xfrm>
+            <a:off x="502920" y="3739896"/>
+            <a:ext cx="2359152" cy="201168"/>
+          </a:xfrm>
+          <a:prstGeom prst="rect">
+            <a:avLst/>
+          </a:prstGeom>
+          <a:noFill/>
+          <a:ln/>
+        </p:spPr>
+        <p:txBody>
+          <a:bodyPr wrap="square" lIns="0" tIns="0" rIns="0" bIns="0" rtlCol="0" anchor="ctr"/>
+          <a:lstStyle/>
+          <a:p>
+            <a:pPr indent="0" marL="0">
+              <a:buNone/>
+            </a:pPr>
+            <a:r>
+              <a:rPr lang="en-US" sz="750" dirty="0">
+                <a:solidFill>
+                  <a:srgbClr val="3A5080"/>
+                </a:solidFill>
+                <a:latin typeface="Calibri" pitchFamily="34" charset="0"/>
+                <a:ea typeface="Calibri" pitchFamily="34" charset="-122"/>
+                <a:cs typeface="Calibri" pitchFamily="34" charset="-120"/>
+              </a:rPr>
+              <a:t>Rounded-amount flag · 30d rolling avg deviation</a:t>
+            </a:r>
+            <a:endParaRPr lang="en-US" sz="750" dirty="0"/>
+          </a:p>
+        </p:txBody>
+      </p:sp>
+      <p:sp>
+        <p:nvSpPr>
+          <p:cNvPr id="64" name="Shape 62"/>
+          <p:cNvSpPr/>
+          <p:nvPr/>
+        </p:nvSpPr>
+        <p:spPr>
+          <a:xfrm>
+            <a:off x="3145536" y="2615184"/>
+            <a:ext cx="2706624" cy="1389888"/>
+          </a:xfrm>
+          <a:prstGeom prst="rect">
+            <a:avLst/>
+          </a:prstGeom>
+          <a:solidFill>
+            <a:srgbClr val="FFFFFF"/>
+          </a:solidFill>
+          <a:ln w="12700">
+            <a:solidFill>
+              <a:srgbClr val="DAEAF8"/>
+            </a:solidFill>
+            <a:prstDash val="solid"/>
+          </a:ln>
+          <a:effectLst>
+            <a:outerShdw sx="100000" sy="100000" kx="0" ky="0" algn="bl" rotWithShape="0" blurRad="63500" dist="25400" dir="8100000">
+              <a:srgbClr val="000000">
+                <a:alpha val="12000"/>
+              </a:srgbClr>
+            </a:outerShdw>
+          </a:effectLst>
+        </p:spPr>
+      </p:sp>
+      <p:sp>
+        <p:nvSpPr>
+          <p:cNvPr id="65" name="Shape 63"/>
+          <p:cNvSpPr/>
+          <p:nvPr/>
+        </p:nvSpPr>
+        <p:spPr>
+          <a:xfrm>
+            <a:off x="3145536" y="2615184"/>
+            <a:ext cx="2706624" cy="384048"/>
+          </a:xfrm>
+          <a:prstGeom prst="rect">
+            <a:avLst/>
+          </a:prstGeom>
+          <a:solidFill>
+            <a:srgbClr val="38BDF8"/>
+          </a:solidFill>
+          <a:ln w="12700">
+            <a:solidFill>
+              <a:srgbClr val="38BDF8"/>
+            </a:solidFill>
+            <a:prstDash val="solid"/>
+          </a:ln>
+        </p:spPr>
+      </p:sp>
+      <p:sp>
+        <p:nvSpPr>
+          <p:cNvPr id="66" name="Shape 64"/>
+          <p:cNvSpPr/>
+          <p:nvPr/>
+        </p:nvSpPr>
+        <p:spPr>
+          <a:xfrm>
+            <a:off x="3255264" y="2688336"/>
+            <a:ext cx="329184" cy="237744"/>
+          </a:xfrm>
+          <a:prstGeom prst="rect">
+            <a:avLst/>
+          </a:prstGeom>
+          <a:solidFill>
+            <a:srgbClr val="0A1C40"/>
+          </a:solidFill>
+          <a:ln w="12700">
+            <a:solidFill>
+              <a:srgbClr val="0A1C40"/>
+            </a:solidFill>
+            <a:prstDash val="solid"/>
+          </a:ln>
+        </p:spPr>
+      </p:sp>
+      <p:sp>
+        <p:nvSpPr>
+          <p:cNvPr id="67" name="Text 65"/>
+          <p:cNvSpPr/>
+          <p:nvPr/>
+        </p:nvSpPr>
+        <p:spPr>
+          <a:xfrm>
+            <a:off x="3255264" y="2688336"/>
+            <a:ext cx="329184" cy="237744"/>
+          </a:xfrm>
+          <a:prstGeom prst="rect">
+            <a:avLst/>
+          </a:prstGeom>
+          <a:noFill/>
+          <a:ln/>
+        </p:spPr>
+        <p:txBody>
+          <a:bodyPr wrap="square" lIns="0" tIns="0" rIns="0" bIns="0" rtlCol="0" anchor="ctr"/>
+          <a:lstStyle/>
+          <a:p>
+            <a:pPr algn="ctr" indent="0" marL="0">
+              <a:buNone/>
+            </a:pPr>
+            <a:r>
+              <a:rPr lang="en-US" sz="750" b="1" dirty="0">
+                <a:solidFill>
+                  <a:srgbClr val="FFFFFF"/>
+                </a:solidFill>
+                <a:latin typeface="Calibri" pitchFamily="34" charset="0"/>
+                <a:ea typeface="Calibri" pitchFamily="34" charset="-122"/>
+                <a:cs typeface="Calibri" pitchFamily="34" charset="-120"/>
+              </a:rPr>
+              <a:t>TDL</a:t>
+            </a:r>
+            <a:endParaRPr lang="en-US" sz="750" dirty="0"/>
+          </a:p>
+        </p:txBody>
+      </p:sp>
+      <p:sp>
+        <p:nvSpPr>
+          <p:cNvPr id="68" name="Text 66"/>
+          <p:cNvSpPr/>
+          <p:nvPr/>
+        </p:nvSpPr>
+        <p:spPr>
+          <a:xfrm>
+            <a:off x="3675888" y="2670048"/>
+            <a:ext cx="2066544" cy="201168"/>
+          </a:xfrm>
+          <a:prstGeom prst="rect">
+            <a:avLst/>
+          </a:prstGeom>
+          <a:noFill/>
+          <a:ln/>
+        </p:spPr>
+        <p:txBody>
+          <a:bodyPr wrap="square" lIns="0" tIns="0" rIns="0" bIns="0" rtlCol="0" anchor="ctr"/>
+          <a:lstStyle/>
+          <a:p>
+            <a:pPr indent="0" marL="0">
+              <a:buNone/>
+            </a:pPr>
+            <a:r>
+              <a:rPr lang="en-US" sz="1200" b="1" dirty="0">
+                <a:solidFill>
+                  <a:srgbClr val="0A1C40"/>
+                </a:solidFill>
+                <a:latin typeface="Calibri" pitchFamily="34" charset="0"/>
+                <a:ea typeface="Calibri" pitchFamily="34" charset="-122"/>
+                <a:cs typeface="Calibri" pitchFamily="34" charset="-120"/>
+              </a:rPr>
+              <a:t>Time Deltas</a:t>
+            </a:r>
+            <a:endParaRPr lang="en-US" sz="1200" dirty="0"/>
+          </a:p>
+        </p:txBody>
+      </p:sp>
+      <p:sp>
+        <p:nvSpPr>
+          <p:cNvPr id="69" name="Text 67"/>
+          <p:cNvSpPr/>
+          <p:nvPr/>
+        </p:nvSpPr>
+        <p:spPr>
+          <a:xfrm>
+            <a:off x="3675888" y="2862072"/>
+            <a:ext cx="2066544" cy="128016"/>
+          </a:xfrm>
+          <a:prstGeom prst="rect">
+            <a:avLst/>
+          </a:prstGeom>
+          <a:noFill/>
+          <a:ln/>
+        </p:spPr>
+        <p:txBody>
+          <a:bodyPr wrap="square" lIns="0" tIns="0" rIns="0" bIns="0" rtlCol="0" anchor="ctr"/>
+          <a:lstStyle/>
+          <a:p>
+            <a:pPr indent="0" marL="0">
+              <a:buNone/>
+            </a:pPr>
+            <a:r>
+              <a:rPr lang="en-US" sz="800" i="1" dirty="0">
+                <a:solidFill>
+                  <a:srgbClr val="0A1C40"/>
+                </a:solidFill>
+                <a:latin typeface="Calibri" pitchFamily="34" charset="0"/>
+                <a:ea typeface="Calibri" pitchFamily="34" charset="-122"/>
+                <a:cs typeface="Calibri" pitchFamily="34" charset="-120"/>
+              </a:rPr>
+              <a:t>When and how often</a:t>
+            </a:r>
+            <a:endParaRPr lang="en-US" sz="800" dirty="0"/>
+          </a:p>
+        </p:txBody>
+      </p:sp>
+      <p:sp>
+        <p:nvSpPr>
+          <p:cNvPr id="70" name="Shape 68"/>
+          <p:cNvSpPr/>
+          <p:nvPr/>
+        </p:nvSpPr>
+        <p:spPr>
+          <a:xfrm>
+            <a:off x="3273552" y="3118104"/>
+            <a:ext cx="54864" cy="73152"/>
+          </a:xfrm>
+          <a:prstGeom prst="rect">
+            <a:avLst/>
+          </a:prstGeom>
+          <a:solidFill>
+            <a:srgbClr val="38BDF8"/>
+          </a:solidFill>
+          <a:ln w="12700">
+            <a:solidFill>
+              <a:srgbClr val="38BDF8"/>
+            </a:solidFill>
+            <a:prstDash val="solid"/>
+          </a:ln>
+        </p:spPr>
+      </p:sp>
+      <p:sp>
+        <p:nvSpPr>
+          <p:cNvPr id="71" name="Text 69"/>
+          <p:cNvSpPr/>
+          <p:nvPr/>
+        </p:nvSpPr>
+        <p:spPr>
+          <a:xfrm>
+            <a:off x="3392424" y="3054096"/>
+            <a:ext cx="2359152" cy="201168"/>
+          </a:xfrm>
+          <a:prstGeom prst="rect">
+            <a:avLst/>
+          </a:prstGeom>
+          <a:noFill/>
+          <a:ln/>
+        </p:spPr>
+        <p:txBody>
+          <a:bodyPr wrap="square" lIns="0" tIns="0" rIns="0" bIns="0" rtlCol="0" anchor="ctr"/>
+          <a:lstStyle/>
+          <a:p>
+            <a:pPr indent="0" marL="0">
+              <a:buNone/>
+            </a:pPr>
+            <a:r>
+              <a:rPr lang="en-US" sz="750" dirty="0">
+                <a:solidFill>
+                  <a:srgbClr val="3A5080"/>
+                </a:solidFill>
+                <a:latin typeface="Calibri" pitchFamily="34" charset="0"/>
+                <a:ea typeface="Calibri" pitchFamily="34" charset="-122"/>
+                <a:cs typeface="Calibri" pitchFamily="34" charset="-120"/>
+              </a:rPr>
+              <a:t>Seconds since last TX  (same rail · same destination)</a:t>
+            </a:r>
+            <a:endParaRPr lang="en-US" sz="750" dirty="0"/>
+          </a:p>
+        </p:txBody>
+      </p:sp>
+      <p:sp>
+        <p:nvSpPr>
+          <p:cNvPr id="72" name="Shape 70"/>
+          <p:cNvSpPr/>
+          <p:nvPr/>
+        </p:nvSpPr>
+        <p:spPr>
+          <a:xfrm>
+            <a:off x="3273552" y="3346704"/>
+            <a:ext cx="54864" cy="73152"/>
+          </a:xfrm>
+          <a:prstGeom prst="rect">
+            <a:avLst/>
+          </a:prstGeom>
+          <a:solidFill>
+            <a:srgbClr val="38BDF8"/>
+          </a:solidFill>
+          <a:ln w="12700">
+            <a:solidFill>
+              <a:srgbClr val="38BDF8"/>
+            </a:solidFill>
+            <a:prstDash val="solid"/>
+          </a:ln>
+        </p:spPr>
+      </p:sp>
+      <p:sp>
+        <p:nvSpPr>
+          <p:cNvPr id="73" name="Text 71"/>
+          <p:cNvSpPr/>
+          <p:nvPr/>
+        </p:nvSpPr>
+        <p:spPr>
+          <a:xfrm>
+            <a:off x="3392424" y="3282696"/>
+            <a:ext cx="2359152" cy="201168"/>
+          </a:xfrm>
+          <a:prstGeom prst="rect">
+            <a:avLst/>
+          </a:prstGeom>
+          <a:noFill/>
+          <a:ln/>
+        </p:spPr>
+        <p:txBody>
+          <a:bodyPr wrap="square" lIns="0" tIns="0" rIns="0" bIns="0" rtlCol="0" anchor="ctr"/>
+          <a:lstStyle/>
+          <a:p>
+            <a:pPr indent="0" marL="0">
+              <a:buNone/>
+            </a:pPr>
+            <a:r>
+              <a:rPr lang="en-US" sz="750" dirty="0">
+                <a:solidFill>
+                  <a:srgbClr val="3A5080"/>
+                </a:solidFill>
+                <a:latin typeface="Calibri" pitchFamily="34" charset="0"/>
+                <a:ea typeface="Calibri" pitchFamily="34" charset="-122"/>
+                <a:cs typeface="Calibri" pitchFamily="34" charset="-120"/>
+              </a:rPr>
+              <a:t>Hour of day · day of week · month</a:t>
+            </a:r>
+            <a:endParaRPr lang="en-US" sz="750" dirty="0"/>
+          </a:p>
+        </p:txBody>
+      </p:sp>
+      <p:sp>
+        <p:nvSpPr>
+          <p:cNvPr id="74" name="Shape 72"/>
+          <p:cNvSpPr/>
+          <p:nvPr/>
+        </p:nvSpPr>
+        <p:spPr>
+          <a:xfrm>
+            <a:off x="3273552" y="3575304"/>
+            <a:ext cx="54864" cy="73152"/>
+          </a:xfrm>
+          <a:prstGeom prst="rect">
+            <a:avLst/>
+          </a:prstGeom>
+          <a:solidFill>
+            <a:srgbClr val="38BDF8"/>
+          </a:solidFill>
+          <a:ln w="12700">
+            <a:solidFill>
+              <a:srgbClr val="38BDF8"/>
+            </a:solidFill>
+            <a:prstDash val="solid"/>
+          </a:ln>
+        </p:spPr>
+      </p:sp>
+      <p:sp>
+        <p:nvSpPr>
+          <p:cNvPr id="75" name="Text 73"/>
+          <p:cNvSpPr/>
+          <p:nvPr/>
+        </p:nvSpPr>
+        <p:spPr>
+          <a:xfrm>
+            <a:off x="3392424" y="3511296"/>
+            <a:ext cx="2359152" cy="201168"/>
+          </a:xfrm>
+          <a:prstGeom prst="rect">
+            <a:avLst/>
+          </a:prstGeom>
+          <a:noFill/>
+          <a:ln/>
+        </p:spPr>
+        <p:txBody>
+          <a:bodyPr wrap="square" lIns="0" tIns="0" rIns="0" bIns="0" rtlCol="0" anchor="ctr"/>
+          <a:lstStyle/>
+          <a:p>
+            <a:pPr indent="0" marL="0">
+              <a:buNone/>
+            </a:pPr>
+            <a:r>
+              <a:rPr lang="en-US" sz="750" dirty="0">
+                <a:solidFill>
+                  <a:srgbClr val="3A5080"/>
+                </a:solidFill>
+                <a:latin typeface="Calibri" pitchFamily="34" charset="0"/>
+                <a:ea typeface="Calibri" pitchFamily="34" charset="-122"/>
+                <a:cs typeface="Calibri" pitchFamily="34" charset="-120"/>
+              </a:rPr>
+              <a:t>Inter-arrival time mean + variance  (30d window)</a:t>
+            </a:r>
+            <a:endParaRPr lang="en-US" sz="750" dirty="0"/>
+          </a:p>
+        </p:txBody>
+      </p:sp>
+      <p:sp>
+        <p:nvSpPr>
+          <p:cNvPr id="76" name="Shape 74"/>
+          <p:cNvSpPr/>
+          <p:nvPr/>
+        </p:nvSpPr>
+        <p:spPr>
+          <a:xfrm>
+            <a:off x="3273552" y="3803904"/>
+            <a:ext cx="54864" cy="73152"/>
+          </a:xfrm>
+          <a:prstGeom prst="rect">
+            <a:avLst/>
+          </a:prstGeom>
+          <a:solidFill>
+            <a:srgbClr val="38BDF8"/>
+          </a:solidFill>
+          <a:ln w="12700">
+            <a:solidFill>
+              <a:srgbClr val="38BDF8"/>
+            </a:solidFill>
+            <a:prstDash val="solid"/>
+          </a:ln>
+        </p:spPr>
+      </p:sp>
+      <p:sp>
+        <p:nvSpPr>
+          <p:cNvPr id="77" name="Text 75"/>
+          <p:cNvSpPr/>
+          <p:nvPr/>
+        </p:nvSpPr>
+        <p:spPr>
+          <a:xfrm>
+            <a:off x="3392424" y="3739896"/>
+            <a:ext cx="2359152" cy="201168"/>
+          </a:xfrm>
+          <a:prstGeom prst="rect">
+            <a:avLst/>
+          </a:prstGeom>
+          <a:noFill/>
+          <a:ln/>
+        </p:spPr>
+        <p:txBody>
+          <a:bodyPr wrap="square" lIns="0" tIns="0" rIns="0" bIns="0" rtlCol="0" anchor="ctr"/>
+          <a:lstStyle/>
+          <a:p>
+            <a:pPr indent="0" marL="0">
+              <a:buNone/>
+            </a:pPr>
+            <a:r>
+              <a:rPr lang="en-US" sz="750" dirty="0">
+                <a:solidFill>
+                  <a:srgbClr val="3A5080"/>
+                </a:solidFill>
+                <a:latin typeface="Calibri" pitchFamily="34" charset="0"/>
+                <a:ea typeface="Calibri" pitchFamily="34" charset="-122"/>
+                <a:cs typeface="Calibri" pitchFamily="34" charset="-120"/>
+              </a:rPr>
+              <a:t>Rolling velocity: 1-hr / 24-hr / 7-day TX count</a:t>
+            </a:r>
+            <a:endParaRPr lang="en-US" sz="750" dirty="0"/>
+          </a:p>
+        </p:txBody>
+      </p:sp>
+      <p:sp>
+        <p:nvSpPr>
+          <p:cNvPr id="78" name="Shape 76"/>
+          <p:cNvSpPr/>
+          <p:nvPr/>
+        </p:nvSpPr>
+        <p:spPr>
+          <a:xfrm>
+            <a:off x="6035040" y="2615184"/>
+            <a:ext cx="2706624" cy="1389888"/>
+          </a:xfrm>
+          <a:prstGeom prst="rect">
+            <a:avLst/>
+          </a:prstGeom>
+          <a:solidFill>
+            <a:srgbClr val="FFFFFF"/>
+          </a:solidFill>
+          <a:ln w="12700">
+            <a:solidFill>
+              <a:srgbClr val="DAEAF8"/>
+            </a:solidFill>
+            <a:prstDash val="solid"/>
+          </a:ln>
+          <a:effectLst>
+            <a:outerShdw sx="100000" sy="100000" kx="0" ky="0" algn="bl" rotWithShape="0" blurRad="63500" dist="25400" dir="8100000">
+              <a:srgbClr val="000000">
+                <a:alpha val="12000"/>
+              </a:srgbClr>
+            </a:outerShdw>
+          </a:effectLst>
+        </p:spPr>
+      </p:sp>
+      <p:sp>
+        <p:nvSpPr>
+          <p:cNvPr id="79" name="Shape 77"/>
+          <p:cNvSpPr/>
+          <p:nvPr/>
+        </p:nvSpPr>
+        <p:spPr>
+          <a:xfrm>
+            <a:off x="6035040" y="2615184"/>
+            <a:ext cx="2706624" cy="384048"/>
+          </a:xfrm>
+          <a:prstGeom prst="rect">
+            <a:avLst/>
+          </a:prstGeom>
+          <a:solidFill>
+            <a:srgbClr val="4ADE80"/>
+          </a:solidFill>
+          <a:ln w="12700">
+            <a:solidFill>
+              <a:srgbClr val="4ADE80"/>
+            </a:solidFill>
+            <a:prstDash val="solid"/>
+          </a:ln>
+        </p:spPr>
+      </p:sp>
+      <p:sp>
+        <p:nvSpPr>
+          <p:cNvPr id="80" name="Shape 78"/>
+          <p:cNvSpPr/>
+          <p:nvPr/>
+        </p:nvSpPr>
+        <p:spPr>
+          <a:xfrm>
+            <a:off x="6144768" y="2688336"/>
+            <a:ext cx="329184" cy="237744"/>
+          </a:xfrm>
+          <a:prstGeom prst="rect">
+            <a:avLst/>
+          </a:prstGeom>
+          <a:solidFill>
+            <a:srgbClr val="0A1C40"/>
+          </a:solidFill>
+          <a:ln w="12700">
+            <a:solidFill>
+              <a:srgbClr val="0A1C40"/>
+            </a:solidFill>
+            <a:prstDash val="solid"/>
+          </a:ln>
+        </p:spPr>
+      </p:sp>
+      <p:sp>
+        <p:nvSpPr>
+          <p:cNvPr id="81" name="Text 79"/>
+          <p:cNvSpPr/>
+          <p:nvPr/>
+        </p:nvSpPr>
+        <p:spPr>
+          <a:xfrm>
+            <a:off x="6144768" y="2688336"/>
+            <a:ext cx="329184" cy="237744"/>
+          </a:xfrm>
+          <a:prstGeom prst="rect">
+            <a:avLst/>
+          </a:prstGeom>
+          <a:noFill/>
+          <a:ln/>
+        </p:spPr>
+        <p:txBody>
+          <a:bodyPr wrap="square" lIns="0" tIns="0" rIns="0" bIns="0" rtlCol="0" anchor="ctr"/>
+          <a:lstStyle/>
+          <a:p>
+            <a:pPr algn="ctr" indent="0" marL="0">
+              <a:buNone/>
+            </a:pPr>
+            <a:r>
+              <a:rPr lang="en-US" sz="750" b="1" dirty="0">
+                <a:solidFill>
+                  <a:srgbClr val="FFFFFF"/>
+                </a:solidFill>
+                <a:latin typeface="Calibri" pitchFamily="34" charset="0"/>
+                <a:ea typeface="Calibri" pitchFamily="34" charset="-122"/>
+                <a:cs typeface="Calibri" pitchFamily="34" charset="-120"/>
+              </a:rPr>
+              <a:t>GRF</a:t>
+            </a:r>
+            <a:endParaRPr lang="en-US" sz="750" dirty="0"/>
+          </a:p>
+        </p:txBody>
+      </p:sp>
+      <p:sp>
+        <p:nvSpPr>
+          <p:cNvPr id="82" name="Text 80"/>
+          <p:cNvSpPr/>
+          <p:nvPr/>
+        </p:nvSpPr>
+        <p:spPr>
+          <a:xfrm>
+            <a:off x="6565392" y="2670048"/>
+            <a:ext cx="2066544" cy="201168"/>
+          </a:xfrm>
+          <a:prstGeom prst="rect">
+            <a:avLst/>
+          </a:prstGeom>
+          <a:noFill/>
+          <a:ln/>
+        </p:spPr>
+        <p:txBody>
+          <a:bodyPr wrap="square" lIns="0" tIns="0" rIns="0" bIns="0" rtlCol="0" anchor="ctr"/>
+          <a:lstStyle/>
+          <a:p>
+            <a:pPr indent="0" marL="0">
+              <a:buNone/>
+            </a:pPr>
+            <a:r>
+              <a:rPr lang="en-US" sz="1200" b="1" dirty="0">
+                <a:solidFill>
+                  <a:srgbClr val="0A1C40"/>
+                </a:solidFill>
+                <a:latin typeface="Calibri" pitchFamily="34" charset="0"/>
+                <a:ea typeface="Calibri" pitchFamily="34" charset="-122"/>
+                <a:cs typeface="Calibri" pitchFamily="34" charset="-120"/>
+              </a:rPr>
+              <a:t>Graph Features</a:t>
+            </a:r>
+            <a:endParaRPr lang="en-US" sz="1200" dirty="0"/>
+          </a:p>
+        </p:txBody>
+      </p:sp>
+      <p:sp>
+        <p:nvSpPr>
+          <p:cNvPr id="83" name="Text 81"/>
+          <p:cNvSpPr/>
+          <p:nvPr/>
+        </p:nvSpPr>
+        <p:spPr>
+          <a:xfrm>
+            <a:off x="6565392" y="2862072"/>
+            <a:ext cx="2066544" cy="128016"/>
+          </a:xfrm>
+          <a:prstGeom prst="rect">
+            <a:avLst/>
+          </a:prstGeom>
+          <a:noFill/>
+          <a:ln/>
+        </p:spPr>
+        <p:txBody>
+          <a:bodyPr wrap="square" lIns="0" tIns="0" rIns="0" bIns="0" rtlCol="0" anchor="ctr"/>
+          <a:lstStyle/>
+          <a:p>
+            <a:pPr indent="0" marL="0">
+              <a:buNone/>
+            </a:pPr>
+            <a:r>
+              <a:rPr lang="en-US" sz="800" i="1" dirty="0">
+                <a:solidFill>
+                  <a:srgbClr val="0A1C40"/>
+                </a:solidFill>
+                <a:latin typeface="Calibri" pitchFamily="34" charset="0"/>
+                <a:ea typeface="Calibri" pitchFamily="34" charset="-122"/>
+                <a:cs typeface="Calibri" pitchFamily="34" charset="-120"/>
+              </a:rPr>
+              <a:t>Network topology</a:t>
+            </a:r>
+            <a:endParaRPr lang="en-US" sz="800" dirty="0"/>
+          </a:p>
+        </p:txBody>
+      </p:sp>
+      <p:sp>
+        <p:nvSpPr>
+          <p:cNvPr id="84" name="Shape 82"/>
+          <p:cNvSpPr/>
+          <p:nvPr/>
+        </p:nvSpPr>
+        <p:spPr>
+          <a:xfrm>
+            <a:off x="6163056" y="3118104"/>
+            <a:ext cx="54864" cy="73152"/>
+          </a:xfrm>
+          <a:prstGeom prst="rect">
+            <a:avLst/>
+          </a:prstGeom>
+          <a:solidFill>
+            <a:srgbClr val="4ADE80"/>
+          </a:solidFill>
+          <a:ln w="12700">
+            <a:solidFill>
+              <a:srgbClr val="4ADE80"/>
+            </a:solidFill>
+            <a:prstDash val="solid"/>
+          </a:ln>
+        </p:spPr>
+      </p:sp>
+      <p:sp>
+        <p:nvSpPr>
+          <p:cNvPr id="85" name="Text 83"/>
+          <p:cNvSpPr/>
+          <p:nvPr/>
+        </p:nvSpPr>
+        <p:spPr>
+          <a:xfrm>
+            <a:off x="6281928" y="3054096"/>
+            <a:ext cx="2359152" cy="201168"/>
+          </a:xfrm>
+          <a:prstGeom prst="rect">
+            <a:avLst/>
+          </a:prstGeom>
+          <a:noFill/>
+          <a:ln/>
+        </p:spPr>
+        <p:txBody>
+          <a:bodyPr wrap="square" lIns="0" tIns="0" rIns="0" bIns="0" rtlCol="0" anchor="ctr"/>
+          <a:lstStyle/>
+          <a:p>
+            <a:pPr indent="0" marL="0">
+              <a:buNone/>
+            </a:pPr>
+            <a:r>
+              <a:rPr lang="en-US" sz="750" dirty="0">
+                <a:solidFill>
+                  <a:srgbClr val="3A5080"/>
+                </a:solidFill>
+                <a:latin typeface="Calibri" pitchFamily="34" charset="0"/>
+                <a:ea typeface="Calibri" pitchFamily="34" charset="-122"/>
+                <a:cs typeface="Calibri" pitchFamily="34" charset="-120"/>
+              </a:rPr>
+              <a:t>Originator out-degree · destination in-degree</a:t>
+            </a:r>
+            <a:endParaRPr lang="en-US" sz="750" dirty="0"/>
+          </a:p>
+        </p:txBody>
+      </p:sp>
+      <p:sp>
+        <p:nvSpPr>
+          <p:cNvPr id="86" name="Shape 84"/>
+          <p:cNvSpPr/>
+          <p:nvPr/>
+        </p:nvSpPr>
+        <p:spPr>
+          <a:xfrm>
+            <a:off x="6163056" y="3346704"/>
+            <a:ext cx="54864" cy="73152"/>
+          </a:xfrm>
+          <a:prstGeom prst="rect">
+            <a:avLst/>
+          </a:prstGeom>
+          <a:solidFill>
+            <a:srgbClr val="4ADE80"/>
+          </a:solidFill>
+          <a:ln w="12700">
+            <a:solidFill>
+              <a:srgbClr val="4ADE80"/>
+            </a:solidFill>
+            <a:prstDash val="solid"/>
+          </a:ln>
+        </p:spPr>
+      </p:sp>
+      <p:sp>
+        <p:nvSpPr>
+          <p:cNvPr id="87" name="Text 85"/>
+          <p:cNvSpPr/>
+          <p:nvPr/>
+        </p:nvSpPr>
+        <p:spPr>
+          <a:xfrm>
+            <a:off x="6281928" y="3282696"/>
+            <a:ext cx="2359152" cy="201168"/>
+          </a:xfrm>
+          <a:prstGeom prst="rect">
+            <a:avLst/>
+          </a:prstGeom>
+          <a:noFill/>
+          <a:ln/>
+        </p:spPr>
+        <p:txBody>
+          <a:bodyPr wrap="square" lIns="0" tIns="0" rIns="0" bIns="0" rtlCol="0" anchor="ctr"/>
+          <a:lstStyle/>
+          <a:p>
+            <a:pPr indent="0" marL="0">
+              <a:buNone/>
+            </a:pPr>
+            <a:r>
+              <a:rPr lang="en-US" sz="750" dirty="0">
+                <a:solidFill>
+                  <a:srgbClr val="3A5080"/>
+                </a:solidFill>
+                <a:latin typeface="Calibri" pitchFamily="34" charset="0"/>
+                <a:ea typeface="Calibri" pitchFamily="34" charset="-122"/>
+                <a:cs typeface="Calibri" pitchFamily="34" charset="-120"/>
+              </a:rPr>
+              <a:t>Org-dest pair frequency  (transaction edge weight)</a:t>
+            </a:r>
+            <a:endParaRPr lang="en-US" sz="750" dirty="0"/>
+          </a:p>
+        </p:txBody>
+      </p:sp>
+      <p:sp>
+        <p:nvSpPr>
+          <p:cNvPr id="88" name="Shape 86"/>
+          <p:cNvSpPr/>
+          <p:nvPr/>
+        </p:nvSpPr>
+        <p:spPr>
+          <a:xfrm>
+            <a:off x="6163056" y="3575304"/>
+            <a:ext cx="54864" cy="73152"/>
+          </a:xfrm>
+          <a:prstGeom prst="rect">
+            <a:avLst/>
+          </a:prstGeom>
+          <a:solidFill>
+            <a:srgbClr val="4ADE80"/>
+          </a:solidFill>
+          <a:ln w="12700">
+            <a:solidFill>
+              <a:srgbClr val="4ADE80"/>
+            </a:solidFill>
+            <a:prstDash val="solid"/>
+          </a:ln>
+        </p:spPr>
+      </p:sp>
+      <p:sp>
+        <p:nvSpPr>
+          <p:cNvPr id="89" name="Text 87"/>
+          <p:cNvSpPr/>
+          <p:nvPr/>
+        </p:nvSpPr>
+        <p:spPr>
+          <a:xfrm>
+            <a:off x="6281928" y="3511296"/>
+            <a:ext cx="2359152" cy="201168"/>
+          </a:xfrm>
+          <a:prstGeom prst="rect">
+            <a:avLst/>
+          </a:prstGeom>
+          <a:noFill/>
+          <a:ln/>
+        </p:spPr>
+        <p:txBody>
+          <a:bodyPr wrap="square" lIns="0" tIns="0" rIns="0" bIns="0" rtlCol="0" anchor="ctr"/>
+          <a:lstStyle/>
+          <a:p>
+            <a:pPr indent="0" marL="0">
+              <a:buNone/>
+            </a:pPr>
+            <a:r>
+              <a:rPr lang="en-US" sz="750" dirty="0">
+                <a:solidFill>
+                  <a:srgbClr val="3A5080"/>
+                </a:solidFill>
+                <a:latin typeface="Calibri" pitchFamily="34" charset="0"/>
+                <a:ea typeface="Calibri" pitchFamily="34" charset="-122"/>
+                <a:cs typeface="Calibri" pitchFamily="34" charset="-120"/>
+              </a:rPr>
+              <a:t>Community cluster ID  (Louvain / label propagation)</a:t>
+            </a:r>
+            <a:endParaRPr lang="en-US" sz="750" dirty="0"/>
+          </a:p>
+        </p:txBody>
+      </p:sp>
+      <p:sp>
+        <p:nvSpPr>
+          <p:cNvPr id="90" name="Shape 88"/>
+          <p:cNvSpPr/>
+          <p:nvPr/>
+        </p:nvSpPr>
+        <p:spPr>
+          <a:xfrm>
+            <a:off x="6163056" y="3803904"/>
+            <a:ext cx="54864" cy="73152"/>
+          </a:xfrm>
+          <a:prstGeom prst="rect">
+            <a:avLst/>
+          </a:prstGeom>
+          <a:solidFill>
+            <a:srgbClr val="4ADE80"/>
+          </a:solidFill>
+          <a:ln w="12700">
+            <a:solidFill>
+              <a:srgbClr val="4ADE80"/>
+            </a:solidFill>
+            <a:prstDash val="solid"/>
+          </a:ln>
+        </p:spPr>
+      </p:sp>
+      <p:sp>
+        <p:nvSpPr>
+          <p:cNvPr id="91" name="Text 89"/>
+          <p:cNvSpPr/>
+          <p:nvPr/>
+        </p:nvSpPr>
+        <p:spPr>
+          <a:xfrm>
+            <a:off x="6281928" y="3739896"/>
+            <a:ext cx="2359152" cy="201168"/>
+          </a:xfrm>
+          <a:prstGeom prst="rect">
+            <a:avLst/>
+          </a:prstGeom>
+          <a:noFill/>
+          <a:ln/>
+        </p:spPr>
+        <p:txBody>
+          <a:bodyPr wrap="square" lIns="0" tIns="0" rIns="0" bIns="0" rtlCol="0" anchor="ctr"/>
+          <a:lstStyle/>
+          <a:p>
+            <a:pPr indent="0" marL="0">
+              <a:buNone/>
+            </a:pPr>
+            <a:r>
+              <a:rPr lang="en-US" sz="750" dirty="0">
+                <a:solidFill>
+                  <a:srgbClr val="3A5080"/>
+                </a:solidFill>
+                <a:latin typeface="Calibri" pitchFamily="34" charset="0"/>
+                <a:ea typeface="Calibri" pitchFamily="34" charset="-122"/>
+                <a:cs typeface="Calibri" pitchFamily="34" charset="-120"/>
+              </a:rPr>
+              <a:t>Node2vec embedding  (64-dim, pre-computed per entity)</a:t>
+            </a:r>
+            <a:endParaRPr lang="en-US" sz="750" dirty="0"/>
+          </a:p>
+        </p:txBody>
+      </p:sp>
+      <p:sp>
+        <p:nvSpPr>
+          <p:cNvPr id="92" name="Shape 90"/>
+          <p:cNvSpPr/>
+          <p:nvPr/>
+        </p:nvSpPr>
+        <p:spPr>
+          <a:xfrm>
+            <a:off x="256032" y="4078224"/>
+            <a:ext cx="8631936" cy="384048"/>
+          </a:xfrm>
+          <a:prstGeom prst="rect">
+            <a:avLst/>
+          </a:prstGeom>
+          <a:solidFill>
+            <a:srgbClr val="0A1C40"/>
+          </a:solidFill>
+          <a:ln w="12700">
+            <a:solidFill>
+              <a:srgbClr val="A78BFA"/>
+            </a:solidFill>
+            <a:prstDash val="solid"/>
+          </a:ln>
+        </p:spPr>
+      </p:sp>
+      <p:sp>
+        <p:nvSpPr>
+          <p:cNvPr id="93" name="Shape 91"/>
+          <p:cNvSpPr/>
+          <p:nvPr/>
+        </p:nvSpPr>
+        <p:spPr>
+          <a:xfrm>
+            <a:off x="256032" y="4078224"/>
+            <a:ext cx="8631936" cy="36576"/>
+          </a:xfrm>
+          <a:prstGeom prst="rect">
+            <a:avLst/>
+          </a:prstGeom>
+          <a:solidFill>
+            <a:srgbClr val="A78BFA"/>
+          </a:solidFill>
+          <a:ln w="12700">
+            <a:solidFill>
+              <a:srgbClr val="A78BFA"/>
+            </a:solidFill>
+            <a:prstDash val="solid"/>
+          </a:ln>
+        </p:spPr>
+      </p:sp>
+      <p:sp>
+        <p:nvSpPr>
+          <p:cNvPr id="94" name="Text 92"/>
+          <p:cNvSpPr/>
+          <p:nvPr/>
+        </p:nvSpPr>
+        <p:spPr>
+          <a:xfrm>
+            <a:off x="402336" y="4151376"/>
+            <a:ext cx="1298448" cy="256032"/>
+          </a:xfrm>
+          <a:prstGeom prst="rect">
+            <a:avLst/>
+          </a:prstGeom>
+          <a:noFill/>
+          <a:ln/>
+        </p:spPr>
+        <p:txBody>
+          <a:bodyPr wrap="square" lIns="0" tIns="0" rIns="0" bIns="0" rtlCol="0" anchor="ctr"/>
+          <a:lstStyle/>
+          <a:p>
+            <a:pPr indent="0" marL="0">
+              <a:buNone/>
+            </a:pPr>
+            <a:r>
+              <a:rPr lang="en-US" sz="850" b="1" dirty="0">
+                <a:solidFill>
+                  <a:srgbClr val="A78BFA"/>
+                </a:solidFill>
+                <a:latin typeface="Calibri" pitchFamily="34" charset="0"/>
+                <a:ea typeface="Calibri" pitchFamily="34" charset="-122"/>
+                <a:cs typeface="Calibri" pitchFamily="34" charset="-120"/>
+              </a:rPr>
+              <a:t>Entity Tokenization:</a:t>
+            </a:r>
+            <a:endParaRPr lang="en-US" sz="850" dirty="0"/>
+          </a:p>
+        </p:txBody>
+      </p:sp>
+      <p:sp>
+        <p:nvSpPr>
+          <p:cNvPr id="95" name="Text 93"/>
+          <p:cNvSpPr/>
+          <p:nvPr/>
+        </p:nvSpPr>
+        <p:spPr>
+          <a:xfrm>
+            <a:off x="1773936" y="4133088"/>
+            <a:ext cx="7040880" cy="292608"/>
+          </a:xfrm>
+          <a:prstGeom prst="rect">
+            <a:avLst/>
+          </a:prstGeom>
+          <a:noFill/>
+          <a:ln/>
+        </p:spPr>
+        <p:txBody>
+          <a:bodyPr wrap="square" lIns="0" tIns="0" rIns="0" bIns="0" rtlCol="0" anchor="ctr"/>
+          <a:lstStyle/>
+          <a:p>
+            <a:pPr indent="0" marL="0">
+              <a:buNone/>
+            </a:pPr>
+            <a:r>
+              <a:rPr lang="en-US" sz="850" dirty="0">
+                <a:solidFill>
+                  <a:srgbClr val="C8DFFB"/>
+                </a:solidFill>
+                <a:latin typeface="Calibri" pitchFamily="34" charset="0"/>
+                <a:ea typeface="Calibri" pitchFamily="34" charset="-122"/>
+                <a:cs typeface="Calibri" pitchFamily="34" charset="-120"/>
+              </a:rPr>
+              <a:t>Each unique originator and destination is assigned a stable numeric token ID — the model learns per-entity embeddings from these, capturing behavioral identity without storing account numbers.</a:t>
             </a:r>
             <a:endParaRPr lang="en-US" sz="850" dirty="0"/>
           </a:p>
